--- a/docs/sih-ppt/TATPAR_SIH26249_Idea.pptx
+++ b/docs/sih-ppt/TATPAR_SIH26249_Idea.pptx
@@ -112,32 +112,32 @@
   <p:extLst>
     <p:ext uri="{521415D9-36F7-43E2-AB2F-B90AF26B5E84}">
       <p14:sectionLst xmlns:p14="http://schemas.microsoft.com/office/powerpoint/2010/main">
-        <p14:section name="Title" id="{dd8d36d7-02c8-15bc-f54e-1ed3b02be2d8}">
+        <p14:section name="Title" id="{df94ee4a-32a4-d1f5-d0ab-705beb095b15}">
           <p14:sldIdLst>
             <p14:sldId id="256"/>
           </p14:sldIdLst>
         </p14:section>
-        <p14:section name="Solution" id="{1749f85d-53b6-eb28-8d05-6ea66c571e24}">
+        <p14:section name="Solution" id="{85dacdcb-feb7-a313-2bd0-974fbe3bcdd3}">
           <p14:sldIdLst>
             <p14:sldId id="257"/>
           </p14:sldIdLst>
         </p14:section>
-        <p14:section name="Approach" id="{e5eda7ee-d79a-7bb1-c6ae-54841d22b011}">
+        <p14:section name="Approach" id="{b134f335-ca55-52ea-dbe9-20a28e4048a3}">
           <p14:sldIdLst>
             <p14:sldId id="258"/>
           </p14:sldIdLst>
         </p14:section>
-        <p14:section name="Feasibility" id="{895c6d73-a13e-e557-36c9-41d6cd1805a7}">
+        <p14:section name="Feasibility" id="{6bbd1751-37ef-0593-4cb8-8ae7dcb9c80c}">
           <p14:sldIdLst>
             <p14:sldId id="259"/>
           </p14:sldIdLst>
         </p14:section>
-        <p14:section name="Impact" id="{35242fb5-e6e1-012c-ea84-f0d7a192c2b3}">
+        <p14:section name="Impact" id="{c308d545-47ea-c54b-3760-d8e6bdc14a42}">
           <p14:sldIdLst>
             <p14:sldId id="260"/>
           </p14:sldIdLst>
         </p14:section>
-        <p14:section name="References" id="{81f1bdc8-01fc-bcd6-a6a5-954384171b87}">
+        <p14:section name="References" id="{887950e2-d65d-d0fc-3451-7d475ba495ca}">
           <p14:sldIdLst>
             <p14:sldId id="261"/>
           </p14:sldIdLst>
@@ -898,7 +898,7 @@
           <a:p>
             <a:r>
               <a:rPr lang="en-US" dirty="0"/>
-              <a:t>Context figures are from open sources (see references). The +1 point arithmetic is illustrative: 1 % of ~550 fighters.</a:t>
+              <a:t>The first two figures are from open sources (see references). The third is measured in the TATPAR prototype on a notional fleet: +20.3 ± 0.5 points over one year, 24 hidden-truth futures.</a:t>
             </a:r>
             <a:endParaRPr lang="en-US" dirty="0"/>
           </a:p>
@@ -4058,11 +4058,11 @@
         <p:spPr>
           <a:xfrm>
             <a:off x="457200" y="1188720"/>
-            <a:ext cx="3566160" cy="1481328"/>
+            <a:ext cx="3566160" cy="1572768"/>
           </a:xfrm>
           <a:prstGeom prst="roundRect">
             <a:avLst>
-              <a:gd name="adj" fmla="val 7407"/>
+              <a:gd name="adj" fmla="val 6977"/>
             </a:avLst>
           </a:prstGeom>
           <a:solidFill>
@@ -4103,10 +4103,10 @@
             <a:r>
               <a:rPr lang="en-US" sz="3600" b="1" dirty="0">
                 <a:solidFill>
-                  <a:schemeClr val="accent1"/>
-                </a:solidFill>
-              </a:rPr>
-              <a:t>100 %</a:t>
+                  <a:schemeClr val="accent2"/>
+                </a:solidFill>
+              </a:rPr>
+              <a:t>+20 pts</a:t>
             </a:r>
             <a:endParaRPr lang="en-US" sz="3600" dirty="0"/>
           </a:p>
@@ -4121,7 +4121,7 @@
         <p:spPr>
           <a:xfrm>
             <a:off x="685800" y="1938528"/>
-            <a:ext cx="3154680" cy="640080"/>
+            <a:ext cx="3154680" cy="749808"/>
           </a:xfrm>
           <a:prstGeom prst="rect">
             <a:avLst/>
@@ -4142,7 +4142,7 @@
                   <a:schemeClr val="tx2"/>
                 </a:solidFill>
               </a:rPr>
-              <a:t>public + synthetic data — no classified inputs needed to build or demo</a:t>
+              <a:t>mission-capable in the working prototype’s Fleet Twin: 57.7 → 78.0 %, same fleet and spares budget (notional data)</a:t>
             </a:r>
             <a:endParaRPr lang="en-US" sz="1300" dirty="0"/>
           </a:p>
@@ -4156,12 +4156,12 @@
         </p:nvSpPr>
         <p:spPr>
           <a:xfrm>
-            <a:off x="457200" y="2807208"/>
-            <a:ext cx="3566160" cy="1481328"/>
+            <a:off x="457200" y="2871216"/>
+            <a:ext cx="3566160" cy="1572768"/>
           </a:xfrm>
           <a:prstGeom prst="roundRect">
             <a:avLst>
-              <a:gd name="adj" fmla="val 7407"/>
+              <a:gd name="adj" fmla="val 6977"/>
             </a:avLst>
           </a:prstGeom>
           <a:solidFill>
@@ -4183,7 +4183,7 @@
         </p:nvSpPr>
         <p:spPr>
           <a:xfrm>
-            <a:off x="685800" y="2916936"/>
+            <a:off x="685800" y="2980944"/>
             <a:ext cx="3108960" cy="640080"/>
           </a:xfrm>
           <a:prstGeom prst="rect">
@@ -4205,7 +4205,7 @@
                   <a:schemeClr val="accent1"/>
                 </a:solidFill>
               </a:rPr>
-              <a:t>0</a:t>
+              <a:t>90 %</a:t>
             </a:r>
             <a:endParaRPr lang="en-US" sz="3600" dirty="0"/>
           </a:p>
@@ -4219,8 +4219,8 @@
         </p:nvSpPr>
         <p:spPr>
           <a:xfrm>
-            <a:off x="685800" y="3557016"/>
-            <a:ext cx="3154680" cy="640080"/>
+            <a:off x="685800" y="3621024"/>
+            <a:ext cx="3154680" cy="749808"/>
           </a:xfrm>
           <a:prstGeom prst="rect">
             <a:avLst/>
@@ -4241,7 +4241,7 @@
                   <a:schemeClr val="tx2"/>
                 </a:solidFill>
               </a:rPr>
-              <a:t>cloud dependencies at runtime — runs air-gapped on a CPU laptop or edge server</a:t>
+              <a:t>calibrated engine-RUL interval coverage on NASA C-MAPSS test sets (82.7 % before conformal calibration)</a:t>
             </a:r>
             <a:endParaRPr lang="en-US" sz="1300" dirty="0"/>
           </a:p>
@@ -4255,12 +4255,12 @@
         </p:nvSpPr>
         <p:spPr>
           <a:xfrm>
-            <a:off x="457200" y="4425696"/>
-            <a:ext cx="3566160" cy="1481328"/>
+            <a:off x="457200" y="4553712"/>
+            <a:ext cx="3566160" cy="1572768"/>
           </a:xfrm>
           <a:prstGeom prst="roundRect">
             <a:avLst>
-              <a:gd name="adj" fmla="val 7407"/>
+              <a:gd name="adj" fmla="val 6977"/>
             </a:avLst>
           </a:prstGeom>
           <a:solidFill>
@@ -4282,7 +4282,7 @@
         </p:nvSpPr>
         <p:spPr>
           <a:xfrm>
-            <a:off x="685800" y="4535424"/>
+            <a:off x="685800" y="4663440"/>
             <a:ext cx="3108960" cy="640080"/>
           </a:xfrm>
           <a:prstGeom prst="rect">
@@ -4301,10 +4301,10 @@
             <a:r>
               <a:rPr lang="en-US" sz="3600" b="1" dirty="0">
                 <a:solidFill>
-                  <a:schemeClr val="accent2"/>
-                </a:solidFill>
-              </a:rPr>
-              <a:t>Proven</a:t>
+                  <a:schemeClr val="accent1"/>
+                </a:solidFill>
+              </a:rPr>
+              <a:t>0</a:t>
             </a:r>
             <a:endParaRPr lang="en-US" sz="3600" dirty="0"/>
           </a:p>
@@ -4318,8 +4318,8 @@
         </p:nvSpPr>
         <p:spPr>
           <a:xfrm>
-            <a:off x="685800" y="5175504"/>
-            <a:ext cx="3154680" cy="640080"/>
+            <a:off x="685800" y="5303520"/>
+            <a:ext cx="3154680" cy="749808"/>
           </a:xfrm>
           <a:prstGeom prst="rect">
             <a:avLst/>
@@ -4340,7 +4340,7 @@
                   <a:schemeClr val="tx2"/>
                 </a:solidFill>
               </a:rPr>
-              <a:t>methods from published air-force research (Hellenic, French, Finnish FMP; USAF sparing)</a:t>
+              <a:t>cloud dependencies — runs air-gapped on a CPU laptop or edge server; public + synthetic data only</a:t>
             </a:r>
             <a:endParaRPr lang="en-US" sz="1300" dirty="0"/>
           </a:p>
@@ -4369,10 +4369,10 @@
             <a:tbl>
               <a:tblPr/>
               <a:tblGrid>
-                <a:gridCol w="2514600"/>
-                <a:gridCol w="4919472"/>
+                <a:gridCol w="2377440"/>
+                <a:gridCol w="5056632"/>
               </a:tblGrid>
-              <a:tr h="548640">
+              <a:tr h="402336">
                 <a:tc>
                   <a:txBody>
                     <a:bodyPr/>
@@ -4382,7 +4382,7 @@
                         <a:buNone/>
                       </a:pPr>
                       <a:r>
-                        <a:rPr lang="en-US" sz="1400" b="1" dirty="0">
+                        <a:rPr lang="en-US" sz="1300" b="1" dirty="0">
                           <a:solidFill>
                             <a:srgbClr val="FFFFFF"/>
                           </a:solidFill>
@@ -4392,14 +4392,14 @@
                         </a:rPr>
                         <a:t>Challenge / risk</a:t>
                       </a:r>
-                      <a:endParaRPr lang="en-US" sz="1400" dirty="0">
+                      <a:endParaRPr lang="en-US" sz="1300" dirty="0">
                         <a:latin typeface="Calibri" charset="0"/>
                         <a:ea typeface="Calibri" charset="0"/>
                         <a:cs typeface="Calibri" charset="0"/>
                       </a:endParaRPr>
                     </a:p>
                   </a:txBody>
-                  <a:tcPr marL="73152" marR="73152" marT="73152" marB="73152" anchor="ctr">
+                  <a:tcPr marL="54864" marR="54864" marT="54864" marB="54864" anchor="ctr">
                     <a:lnL w="6350" cap="flat" cmpd="sng" algn="ctr">
                       <a:solidFill>
                         <a:srgbClr val="D5DEE8"/>
@@ -4450,7 +4450,7 @@
                         <a:buNone/>
                       </a:pPr>
                       <a:r>
-                        <a:rPr lang="en-US" sz="1400" b="1" dirty="0">
+                        <a:rPr lang="en-US" sz="1300" b="1" dirty="0">
                           <a:solidFill>
                             <a:srgbClr val="FFFFFF"/>
                           </a:solidFill>
@@ -4460,14 +4460,14 @@
                         </a:rPr>
                         <a:t>Mitigation built into TATPAR</a:t>
                       </a:r>
-                      <a:endParaRPr lang="en-US" sz="1400" dirty="0">
+                      <a:endParaRPr lang="en-US" sz="1300" dirty="0">
                         <a:latin typeface="Calibri" charset="0"/>
                         <a:ea typeface="Calibri" charset="0"/>
                         <a:cs typeface="Calibri" charset="0"/>
                       </a:endParaRPr>
                     </a:p>
                   </a:txBody>
-                  <a:tcPr marL="73152" marR="73152" marT="73152" marB="73152" anchor="ctr">
+                  <a:tcPr marL="54864" marR="54864" marT="54864" marB="54864" anchor="ctr">
                     <a:lnL w="6350" cap="flat" cmpd="sng" algn="ctr">
                       <a:solidFill>
                         <a:srgbClr val="D5DEE8"/>
@@ -4510,7 +4510,7 @@
                   </a:tcPr>
                 </a:tc>
               </a:tr>
-              <a:tr h="548640">
+              <a:tr h="402336">
                 <a:tc>
                   <a:txBody>
                     <a:bodyPr/>
@@ -4520,7 +4520,7 @@
                         <a:buNone/>
                       </a:pPr>
                       <a:r>
-                        <a:rPr lang="en-US" sz="1300" b="1" dirty="0">
+                        <a:rPr lang="en-US" sz="1200" b="1" dirty="0">
                           <a:solidFill>
                             <a:srgbClr val="0B1B33"/>
                           </a:solidFill>
@@ -4530,14 +4530,14 @@
                         </a:rPr>
                         <a:t>No access to real IAF data</a:t>
                       </a:r>
-                      <a:endParaRPr lang="en-US" sz="1300" dirty="0">
+                      <a:endParaRPr lang="en-US" sz="1200" dirty="0">
                         <a:latin typeface="Calibri" charset="0"/>
                         <a:ea typeface="Calibri" charset="0"/>
                         <a:cs typeface="Calibri" charset="0"/>
                       </a:endParaRPr>
                     </a:p>
                   </a:txBody>
-                  <a:tcPr marL="73152" marR="73152" marT="73152" marB="73152" anchor="ctr">
+                  <a:tcPr marL="54864" marR="54864" marT="54864" marB="54864" anchor="ctr">
                     <a:lnL w="6350" cap="flat" cmpd="sng" algn="ctr">
                       <a:solidFill>
                         <a:srgbClr val="D5DEE8"/>
@@ -4588,7 +4588,7 @@
                         <a:buNone/>
                       </a:pPr>
                       <a:r>
-                        <a:rPr lang="en-US" sz="1300" dirty="0">
+                        <a:rPr lang="en-US" sz="1200" dirty="0">
                           <a:solidFill>
                             <a:srgbClr val="1E3A5F"/>
                           </a:solidFill>
@@ -4598,14 +4598,14 @@
                         </a:rPr>
                         <a:t>Public datasets + synthetic fleet with hidden ground truth; adapters for IMMOLS / e-MMS exports</a:t>
                       </a:r>
-                      <a:endParaRPr lang="en-US" sz="1300" dirty="0">
+                      <a:endParaRPr lang="en-US" sz="1200" dirty="0">
                         <a:latin typeface="Calibri" charset="0"/>
                         <a:ea typeface="Calibri" charset="0"/>
                         <a:cs typeface="Calibri" charset="0"/>
                       </a:endParaRPr>
                     </a:p>
                   </a:txBody>
-                  <a:tcPr marL="73152" marR="73152" marT="73152" marB="73152" anchor="ctr">
+                  <a:tcPr marL="54864" marR="54864" marT="54864" marB="54864" anchor="ctr">
                     <a:lnL w="6350" cap="flat" cmpd="sng" algn="ctr">
                       <a:solidFill>
                         <a:srgbClr val="D5DEE8"/>
@@ -4648,7 +4648,7 @@
                   </a:tcPr>
                 </a:tc>
               </a:tr>
-              <a:tr h="548640">
+              <a:tr h="402336">
                 <a:tc>
                   <a:txBody>
                     <a:bodyPr/>
@@ -4658,7 +4658,7 @@
                         <a:buNone/>
                       </a:pPr>
                       <a:r>
-                        <a:rPr lang="en-US" sz="1300" b="1" dirty="0">
+                        <a:rPr lang="en-US" sz="1200" b="1" dirty="0">
                           <a:solidFill>
                             <a:srgbClr val="0B1B33"/>
                           </a:solidFill>
@@ -4668,14 +4668,14 @@
                         </a:rPr>
                         <a:t>Trust in AI recommendations</a:t>
                       </a:r>
-                      <a:endParaRPr lang="en-US" sz="1300" dirty="0">
+                      <a:endParaRPr lang="en-US" sz="1200" dirty="0">
                         <a:latin typeface="Calibri" charset="0"/>
                         <a:ea typeface="Calibri" charset="0"/>
                         <a:cs typeface="Calibri" charset="0"/>
                       </a:endParaRPr>
                     </a:p>
                   </a:txBody>
-                  <a:tcPr marL="73152" marR="73152" marT="73152" marB="73152" anchor="ctr">
+                  <a:tcPr marL="54864" marR="54864" marT="54864" marB="54864" anchor="ctr">
                     <a:lnL w="6350" cap="flat" cmpd="sng" algn="ctr">
                       <a:solidFill>
                         <a:srgbClr val="D5DEE8"/>
@@ -4726,7 +4726,7 @@
                         <a:buNone/>
                       </a:pPr>
                       <a:r>
-                        <a:rPr lang="en-US" sz="1300" dirty="0">
+                        <a:rPr lang="en-US" sz="1200" dirty="0">
                           <a:solidFill>
                             <a:srgbClr val="1E3A5F"/>
                           </a:solidFill>
@@ -4736,14 +4736,14 @@
                         </a:rPr>
                         <a:t>Calibrated intervals, explanations, human approval, hash-chained audit log</a:t>
                       </a:r>
-                      <a:endParaRPr lang="en-US" sz="1300" dirty="0">
+                      <a:endParaRPr lang="en-US" sz="1200" dirty="0">
                         <a:latin typeface="Calibri" charset="0"/>
                         <a:ea typeface="Calibri" charset="0"/>
                         <a:cs typeface="Calibri" charset="0"/>
                       </a:endParaRPr>
                     </a:p>
                   </a:txBody>
-                  <a:tcPr marL="73152" marR="73152" marT="73152" marB="73152" anchor="ctr">
+                  <a:tcPr marL="54864" marR="54864" marT="54864" marB="54864" anchor="ctr">
                     <a:lnL w="6350" cap="flat" cmpd="sng" algn="ctr">
                       <a:solidFill>
                         <a:srgbClr val="D5DEE8"/>
@@ -4786,7 +4786,7 @@
                   </a:tcPr>
                 </a:tc>
               </a:tr>
-              <a:tr h="548640">
+              <a:tr h="402336">
                 <a:tc>
                   <a:txBody>
                     <a:bodyPr/>
@@ -4796,7 +4796,7 @@
                         <a:buNone/>
                       </a:pPr>
                       <a:r>
-                        <a:rPr lang="en-US" sz="1300" b="1" dirty="0">
+                        <a:rPr lang="en-US" sz="1200" b="1" dirty="0">
                           <a:solidFill>
                             <a:srgbClr val="0B1B33"/>
                           </a:solidFill>
@@ -4806,14 +4806,14 @@
                         </a:rPr>
                         <a:t>Classified, air-gapped networks</a:t>
                       </a:r>
-                      <a:endParaRPr lang="en-US" sz="1300" dirty="0">
+                      <a:endParaRPr lang="en-US" sz="1200" dirty="0">
                         <a:latin typeface="Calibri" charset="0"/>
                         <a:ea typeface="Calibri" charset="0"/>
                         <a:cs typeface="Calibri" charset="0"/>
                       </a:endParaRPr>
                     </a:p>
                   </a:txBody>
-                  <a:tcPr marL="73152" marR="73152" marT="73152" marB="73152" anchor="ctr">
+                  <a:tcPr marL="54864" marR="54864" marT="54864" marB="54864" anchor="ctr">
                     <a:lnL w="6350" cap="flat" cmpd="sng" algn="ctr">
                       <a:solidFill>
                         <a:srgbClr val="D5DEE8"/>
@@ -4864,7 +4864,7 @@
                         <a:buNone/>
                       </a:pPr>
                       <a:r>
-                        <a:rPr lang="en-US" sz="1300" dirty="0">
+                        <a:rPr lang="en-US" sz="1200" dirty="0">
                           <a:solidFill>
                             <a:srgbClr val="1E3A5F"/>
                           </a:solidFill>
@@ -4874,14 +4874,14 @@
                         </a:rPr>
                         <a:t>Fully offline; federated learning shares only model weights</a:t>
                       </a:r>
-                      <a:endParaRPr lang="en-US" sz="1300" dirty="0">
+                      <a:endParaRPr lang="en-US" sz="1200" dirty="0">
                         <a:latin typeface="Calibri" charset="0"/>
                         <a:ea typeface="Calibri" charset="0"/>
                         <a:cs typeface="Calibri" charset="0"/>
                       </a:endParaRPr>
                     </a:p>
                   </a:txBody>
-                  <a:tcPr marL="73152" marR="73152" marT="73152" marB="73152" anchor="ctr">
+                  <a:tcPr marL="54864" marR="54864" marT="54864" marB="54864" anchor="ctr">
                     <a:lnL w="6350" cap="flat" cmpd="sng" algn="ctr">
                       <a:solidFill>
                         <a:srgbClr val="D5DEE8"/>
@@ -4924,7 +4924,7 @@
                   </a:tcPr>
                 </a:tc>
               </a:tr>
-              <a:tr h="548640">
+              <a:tr h="402336">
                 <a:tc>
                   <a:txBody>
                     <a:bodyPr/>
@@ -4934,7 +4934,7 @@
                         <a:buNone/>
                       </a:pPr>
                       <a:r>
-                        <a:rPr lang="en-US" sz="1300" b="1" dirty="0">
+                        <a:rPr lang="en-US" sz="1200" b="1" dirty="0">
                           <a:solidFill>
                             <a:srgbClr val="0B1B33"/>
                           </a:solidFill>
@@ -4944,14 +4944,14 @@
                         </a:rPr>
                         <a:t>Legacy and paper records</a:t>
                       </a:r>
-                      <a:endParaRPr lang="en-US" sz="1300" dirty="0">
+                      <a:endParaRPr lang="en-US" sz="1200" dirty="0">
                         <a:latin typeface="Calibri" charset="0"/>
                         <a:ea typeface="Calibri" charset="0"/>
                         <a:cs typeface="Calibri" charset="0"/>
                       </a:endParaRPr>
                     </a:p>
                   </a:txBody>
-                  <a:tcPr marL="73152" marR="73152" marT="73152" marB="73152" anchor="ctr">
+                  <a:tcPr marL="54864" marR="54864" marT="54864" marB="54864" anchor="ctr">
                     <a:lnL w="6350" cap="flat" cmpd="sng" algn="ctr">
                       <a:solidFill>
                         <a:srgbClr val="D5DEE8"/>
@@ -5002,7 +5002,7 @@
                         <a:buNone/>
                       </a:pPr>
                       <a:r>
-                        <a:rPr lang="en-US" sz="1300" dirty="0">
+                        <a:rPr lang="en-US" sz="1200" dirty="0">
                           <a:solidFill>
                             <a:srgbClr val="1E3A5F"/>
                           </a:solidFill>
@@ -5010,16 +5010,16 @@
                           <a:ea typeface="Calibri" pitchFamily="34" charset="-122"/>
                           <a:cs typeface="Calibri" pitchFamily="34" charset="-120"/>
                         </a:rPr>
-                        <a:t>Common data model (S5000F / ATA), CSV/Excel adapters, data-quality scores</a:t>
+                        <a:t>Common data model (S5000F / ATA), CSV adapters, data-quality scores</a:t>
                       </a:r>
-                      <a:endParaRPr lang="en-US" sz="1300" dirty="0">
+                      <a:endParaRPr lang="en-US" sz="1200" dirty="0">
                         <a:latin typeface="Calibri" charset="0"/>
                         <a:ea typeface="Calibri" charset="0"/>
                         <a:cs typeface="Calibri" charset="0"/>
                       </a:endParaRPr>
                     </a:p>
                   </a:txBody>
-                  <a:tcPr marL="73152" marR="73152" marT="73152" marB="73152" anchor="ctr">
+                  <a:tcPr marL="54864" marR="54864" marT="54864" marB="54864" anchor="ctr">
                     <a:lnL w="6350" cap="flat" cmpd="sng" algn="ctr">
                       <a:solidFill>
                         <a:srgbClr val="D5DEE8"/>
@@ -5062,7 +5062,7 @@
                   </a:tcPr>
                 </a:tc>
               </a:tr>
-              <a:tr h="548640">
+              <a:tr h="402336">
                 <a:tc>
                   <a:txBody>
                     <a:bodyPr/>
@@ -5072,7 +5072,7 @@
                         <a:buNone/>
                       </a:pPr>
                       <a:r>
-                        <a:rPr lang="en-US" sz="1300" b="1" dirty="0">
+                        <a:rPr lang="en-US" sz="1200" b="1" dirty="0">
                           <a:solidFill>
                             <a:srgbClr val="0B1B33"/>
                           </a:solidFill>
@@ -5080,16 +5080,16 @@
                           <a:ea typeface="Calibri" pitchFamily="34" charset="-122"/>
                           <a:cs typeface="Calibri" pitchFamily="34" charset="-120"/>
                         </a:rPr>
-                        <a:t>Optimisation run-time at scale</a:t>
+                        <a:t>Optimisation run-time</a:t>
                       </a:r>
-                      <a:endParaRPr lang="en-US" sz="1300" dirty="0">
+                      <a:endParaRPr lang="en-US" sz="1200" dirty="0">
                         <a:latin typeface="Calibri" charset="0"/>
                         <a:ea typeface="Calibri" charset="0"/>
                         <a:cs typeface="Calibri" charset="0"/>
                       </a:endParaRPr>
                     </a:p>
                   </a:txBody>
-                  <a:tcPr marL="73152" marR="73152" marT="73152" marB="73152" anchor="ctr">
+                  <a:tcPr marL="54864" marR="54864" marT="54864" marB="54864" anchor="ctr">
                     <a:lnL w="6350" cap="flat" cmpd="sng" algn="ctr">
                       <a:solidFill>
                         <a:srgbClr val="D5DEE8"/>
@@ -5140,7 +5140,7 @@
                         <a:buNone/>
                       </a:pPr>
                       <a:r>
-                        <a:rPr lang="en-US" sz="1300" dirty="0">
+                        <a:rPr lang="en-US" sz="1200" dirty="0">
                           <a:solidFill>
                             <a:srgbClr val="1E3A5F"/>
                           </a:solidFill>
@@ -5148,16 +5148,16 @@
                           <a:ea typeface="Calibri" pitchFamily="34" charset="-122"/>
                           <a:cs typeface="Calibri" pitchFamily="34" charset="-120"/>
                         </a:rPr>
-                        <a:t>Rolling horizon, warm start, time-limited CP-SAT, per-squadron decomposition</a:t>
+                        <a:t>CP-SAT plans a squadron in ~1–2 s; rolling horizon, per-squadron decomposition</a:t>
                       </a:r>
-                      <a:endParaRPr lang="en-US" sz="1300" dirty="0">
+                      <a:endParaRPr lang="en-US" sz="1200" dirty="0">
                         <a:latin typeface="Calibri" charset="0"/>
                         <a:ea typeface="Calibri" charset="0"/>
                         <a:cs typeface="Calibri" charset="0"/>
                       </a:endParaRPr>
                     </a:p>
                   </a:txBody>
-                  <a:tcPr marL="73152" marR="73152" marT="73152" marB="73152" anchor="ctr">
+                  <a:tcPr marL="54864" marR="54864" marT="54864" marB="54864" anchor="ctr">
                     <a:lnL w="6350" cap="flat" cmpd="sng" algn="ctr">
                       <a:solidFill>
                         <a:srgbClr val="D5DEE8"/>
@@ -5204,16 +5204,40 @@
           </a:graphicData>
         </a:graphic>
       </p:graphicFrame>
-      <p:sp>
-        <p:nvSpPr>
-          <p:cNvPr id="13" name="path-head"/>
+      <p:pic>
+        <p:nvPicPr>
+          <p:cNvPr id="13" name="shot-0" descr="/home/user/air-power/docs/sih-ppt/shot-planner.png">    </p:cNvPr>
+          <p:cNvPicPr>
+            <a:picLocks noChangeAspect="1"/>
+          </p:cNvPicPr>
+          <p:nvPr/>
+        </p:nvPicPr>
+        <p:blipFill>
+          <a:blip r:embed="rId1"/>
+          <a:stretch>
+            <a:fillRect/>
+          </a:stretch>
+        </p:blipFill>
+        <p:spPr>
+          <a:xfrm>
+            <a:off x="4297680" y="3886200"/>
+            <a:ext cx="2377440" cy="1485900"/>
+          </a:xfrm>
+          <a:prstGeom prst="rect">
+            <a:avLst/>
+          </a:prstGeom>
+        </p:spPr>
+      </p:pic>
+      <p:sp>
+        <p:nvSpPr>
+          <p:cNvPr id="14" name="shot-cap-0"/>
           <p:cNvSpPr txBox="1"/>
           <p:nvPr/>
         </p:nvSpPr>
         <p:spPr>
           <a:xfrm>
-            <a:off x="4297680" y="4846320"/>
-            <a:ext cx="4572000" cy="365760"/>
+            <a:off x="4297680" y="5413248"/>
+            <a:ext cx="2377440" cy="274320"/>
           </a:xfrm>
           <a:prstGeom prst="rect">
             <a:avLst/>
@@ -5229,52 +5253,51 @@
               <a:buNone/>
             </a:pPr>
             <a:r>
-              <a:rPr lang="en-US" sz="1600" b="1" dirty="0">
-                <a:solidFill>
-                  <a:schemeClr val="tx1"/>
-                </a:solidFill>
-              </a:rPr>
-              <a:t>Path to deployment</a:t>
-            </a:r>
-            <a:endParaRPr lang="en-US" sz="1600" dirty="0"/>
-          </a:p>
-        </p:txBody>
-      </p:sp>
-      <p:sp>
-        <p:nvSpPr>
-          <p:cNvPr id="14" name="path-dot-0"/>
-          <p:cNvSpPr/>
-          <p:nvPr/>
-        </p:nvSpPr>
-        <p:spPr>
-          <a:xfrm>
-            <a:off x="4297680" y="5349240"/>
-            <a:ext cx="384048" cy="384048"/>
-          </a:xfrm>
-          <a:prstGeom prst="ellipse">
-            <a:avLst/>
-          </a:prstGeom>
-          <a:solidFill>
-            <a:schemeClr val="accent1"/>
-          </a:solidFill>
-          <a:ln w="12700">
-            <a:solidFill>
-              <a:schemeClr val="accent1"/>
-            </a:solidFill>
-            <a:prstDash val="solid"/>
-          </a:ln>
-        </p:spPr>
-      </p:sp>
-      <p:sp>
-        <p:nvSpPr>
-          <p:cNvPr id="15" name="path-num-0"/>
+              <a:rPr lang="en-US" sz="1100" dirty="0">
+                <a:solidFill>
+                  <a:schemeClr val="accent6"/>
+                </a:solidFill>
+              </a:rPr>
+              <a:t>Readiness planner</a:t>
+            </a:r>
+            <a:endParaRPr lang="en-US" sz="1100" dirty="0"/>
+          </a:p>
+        </p:txBody>
+      </p:sp>
+      <p:pic>
+        <p:nvPicPr>
+          <p:cNvPr id="15" name="shot-1" descr="/home/user/air-power/docs/sih-ppt/shot-flow.png">    </p:cNvPr>
+          <p:cNvPicPr>
+            <a:picLocks noChangeAspect="1"/>
+          </p:cNvPicPr>
+          <p:nvPr/>
+        </p:nvPicPr>
+        <p:blipFill>
+          <a:blip r:embed="rId2"/>
+          <a:stretch>
+            <a:fillRect/>
+          </a:stretch>
+        </p:blipFill>
+        <p:spPr>
+          <a:xfrm>
+            <a:off x="6825996" y="3886200"/>
+            <a:ext cx="2377440" cy="1485900"/>
+          </a:xfrm>
+          <a:prstGeom prst="rect">
+            <a:avLst/>
+          </a:prstGeom>
+        </p:spPr>
+      </p:pic>
+      <p:sp>
+        <p:nvSpPr>
+          <p:cNvPr id="16" name="shot-cap-1"/>
           <p:cNvSpPr txBox="1"/>
           <p:nvPr/>
         </p:nvSpPr>
         <p:spPr>
           <a:xfrm>
-            <a:off x="4297680" y="5349240"/>
-            <a:ext cx="384048" cy="384048"/>
+            <a:off x="6825996" y="5413248"/>
+            <a:ext cx="2377440" cy="274320"/>
           </a:xfrm>
           <a:prstGeom prst="rect">
             <a:avLst/>
@@ -5286,31 +5309,55 @@
           <a:bodyPr wrap="square" lIns="0" tIns="0" rIns="0" bIns="0" rtlCol="0" anchor="ctr"/>
           <a:lstStyle/>
           <a:p>
-            <a:pPr algn="ctr" indent="0" marL="0">
-              <a:buNone/>
-            </a:pPr>
-            <a:r>
-              <a:rPr lang="en-US" sz="1300" b="1" dirty="0">
-                <a:solidFill>
-                  <a:schemeClr val="tx1"/>
-                </a:solidFill>
-              </a:rPr>
-              <a:t>1</a:t>
-            </a:r>
-            <a:endParaRPr lang="en-US" sz="1300" dirty="0"/>
-          </a:p>
-        </p:txBody>
-      </p:sp>
-      <p:sp>
-        <p:nvSpPr>
-          <p:cNvPr id="16" name="path-text-0"/>
+            <a:pPr indent="0" marL="0">
+              <a:buNone/>
+            </a:pPr>
+            <a:r>
+              <a:rPr lang="en-US" sz="1100" dirty="0">
+                <a:solidFill>
+                  <a:schemeClr val="accent6"/>
+                </a:solidFill>
+              </a:rPr>
+              <a:t>CP-SAT flight &amp; maintenance plan</a:t>
+            </a:r>
+            <a:endParaRPr lang="en-US" sz="1100" dirty="0"/>
+          </a:p>
+        </p:txBody>
+      </p:sp>
+      <p:pic>
+        <p:nvPicPr>
+          <p:cNvPr id="17" name="shot-2" descr="/home/user/air-power/docs/sih-ppt/shot-aircraft.png">    </p:cNvPr>
+          <p:cNvPicPr>
+            <a:picLocks noChangeAspect="1"/>
+          </p:cNvPicPr>
+          <p:nvPr/>
+        </p:nvPicPr>
+        <p:blipFill>
+          <a:blip r:embed="rId3"/>
+          <a:stretch>
+            <a:fillRect/>
+          </a:stretch>
+        </p:blipFill>
+        <p:spPr>
+          <a:xfrm>
+            <a:off x="9354312" y="3886200"/>
+            <a:ext cx="2377440" cy="1485900"/>
+          </a:xfrm>
+          <a:prstGeom prst="rect">
+            <a:avLst/>
+          </a:prstGeom>
+        </p:spPr>
+      </p:pic>
+      <p:sp>
+        <p:nvSpPr>
+          <p:cNvPr id="18" name="shot-cap-2"/>
           <p:cNvSpPr txBox="1"/>
           <p:nvPr/>
         </p:nvSpPr>
         <p:spPr>
           <a:xfrm>
-            <a:off x="4754880" y="5198364"/>
-            <a:ext cx="1417320" cy="685800"/>
+            <a:off x="9354312" y="5413248"/>
+            <a:ext cx="2377440" cy="274320"/>
           </a:xfrm>
           <a:prstGeom prst="rect">
             <a:avLst/>
@@ -5326,52 +5373,27 @@
               <a:buNone/>
             </a:pPr>
             <a:r>
-              <a:rPr lang="en-US" sz="1200" dirty="0">
-                <a:solidFill>
-                  <a:schemeClr val="tx2"/>
-                </a:solidFill>
-              </a:rPr>
-              <a:t>SIH prototype</a:t>
-            </a:r>
-            <a:endParaRPr lang="en-US" sz="1200" dirty="0"/>
-          </a:p>
-        </p:txBody>
-      </p:sp>
-      <p:sp>
-        <p:nvSpPr>
-          <p:cNvPr id="17" name="path-dot-1"/>
-          <p:cNvSpPr/>
-          <p:nvPr/>
-        </p:nvSpPr>
-        <p:spPr>
-          <a:xfrm>
-            <a:off x="6199632" y="5349240"/>
-            <a:ext cx="384048" cy="384048"/>
-          </a:xfrm>
-          <a:prstGeom prst="ellipse">
-            <a:avLst/>
-          </a:prstGeom>
-          <a:solidFill>
-            <a:schemeClr val="tx2"/>
-          </a:solidFill>
-          <a:ln w="12700">
-            <a:solidFill>
-              <a:schemeClr val="tx2"/>
-            </a:solidFill>
-            <a:prstDash val="solid"/>
-          </a:ln>
-        </p:spPr>
-      </p:sp>
-      <p:sp>
-        <p:nvSpPr>
-          <p:cNvPr id="18" name="path-num-1"/>
+              <a:rPr lang="en-US" sz="1100" dirty="0">
+                <a:solidFill>
+                  <a:schemeClr val="accent6"/>
+                </a:solidFill>
+              </a:rPr>
+              <a:t>Engine RUL + module attribution</a:t>
+            </a:r>
+            <a:endParaRPr lang="en-US" sz="1100" dirty="0"/>
+          </a:p>
+        </p:txBody>
+      </p:sp>
+      <p:sp>
+        <p:nvSpPr>
+          <p:cNvPr id="19" name="path"/>
           <p:cNvSpPr txBox="1"/>
           <p:nvPr/>
         </p:nvSpPr>
         <p:spPr>
           <a:xfrm>
-            <a:off x="6199632" y="5349240"/>
-            <a:ext cx="384048" cy="384048"/>
+            <a:off x="4297680" y="5760720"/>
+            <a:ext cx="7434072" cy="502920"/>
           </a:xfrm>
           <a:prstGeom prst="rect">
             <a:avLst/>
@@ -5380,45 +5402,20 @@
           <a:ln/>
         </p:spPr>
         <p:txBody>
-          <a:bodyPr wrap="square" lIns="0" tIns="0" rIns="0" bIns="0" rtlCol="0" anchor="ctr"/>
-          <a:lstStyle/>
-          <a:p>
-            <a:pPr algn="ctr" indent="0" marL="0">
-              <a:buNone/>
-            </a:pPr>
-            <a:r>
-              <a:rPr lang="en-US" sz="1300" b="1" dirty="0">
-                <a:solidFill>
-                  <a:schemeClr val="bg1"/>
-                </a:solidFill>
-              </a:rPr>
-              <a:t>2</a:t>
-            </a:r>
-            <a:endParaRPr lang="en-US" sz="1300" dirty="0"/>
-          </a:p>
-        </p:txBody>
-      </p:sp>
-      <p:sp>
-        <p:nvSpPr>
-          <p:cNvPr id="19" name="path-text-1"/>
-          <p:cNvSpPr txBox="1"/>
-          <p:nvPr/>
-        </p:nvSpPr>
-        <p:spPr>
-          <a:xfrm>
-            <a:off x="6656832" y="5198364"/>
-            <a:ext cx="1417320" cy="685800"/>
-          </a:xfrm>
-          <a:prstGeom prst="rect">
-            <a:avLst/>
-          </a:prstGeom>
-          <a:noFill/>
-          <a:ln/>
-        </p:spPr>
-        <p:txBody>
-          <a:bodyPr wrap="square" lIns="0" tIns="0" rIns="0" bIns="0" rtlCol="0" anchor="ctr"/>
-          <a:lstStyle/>
-          <a:p>
+          <a:bodyPr wrap="square" lIns="0" tIns="0" rIns="0" bIns="0" rtlCol="0" anchor="t"/>
+          <a:lstStyle/>
+          <a:p>
+            <a:pPr indent="0" marL="0">
+              <a:buNone/>
+            </a:pPr>
+            <a:r>
+              <a:rPr lang="en-US" sz="1200" b="1" dirty="0">
+                <a:solidFill>
+                  <a:schemeClr val="tx1"/>
+                </a:solidFill>
+              </a:rPr>
+              <a:t>Working prototype built. </a:t>
+            </a:r>
             <a:pPr indent="0" marL="0">
               <a:buNone/>
             </a:pPr>
@@ -5428,201 +5425,7 @@
                   <a:schemeClr val="tx2"/>
                 </a:solidFill>
               </a:rPr>
-              <a:t>Pilot on one squadron’s historical exports</a:t>
-            </a:r>
-            <a:endParaRPr lang="en-US" sz="1200" dirty="0"/>
-          </a:p>
-        </p:txBody>
-      </p:sp>
-      <p:sp>
-        <p:nvSpPr>
-          <p:cNvPr id="20" name="path-dot-2"/>
-          <p:cNvSpPr/>
-          <p:nvPr/>
-        </p:nvSpPr>
-        <p:spPr>
-          <a:xfrm>
-            <a:off x="8101584" y="5349240"/>
-            <a:ext cx="384048" cy="384048"/>
-          </a:xfrm>
-          <a:prstGeom prst="ellipse">
-            <a:avLst/>
-          </a:prstGeom>
-          <a:solidFill>
-            <a:schemeClr val="tx2"/>
-          </a:solidFill>
-          <a:ln w="12700">
-            <a:solidFill>
-              <a:schemeClr val="tx2"/>
-            </a:solidFill>
-            <a:prstDash val="solid"/>
-          </a:ln>
-        </p:spPr>
-      </p:sp>
-      <p:sp>
-        <p:nvSpPr>
-          <p:cNvPr id="21" name="path-num-2"/>
-          <p:cNvSpPr txBox="1"/>
-          <p:nvPr/>
-        </p:nvSpPr>
-        <p:spPr>
-          <a:xfrm>
-            <a:off x="8101584" y="5349240"/>
-            <a:ext cx="384048" cy="384048"/>
-          </a:xfrm>
-          <a:prstGeom prst="rect">
-            <a:avLst/>
-          </a:prstGeom>
-          <a:noFill/>
-          <a:ln/>
-        </p:spPr>
-        <p:txBody>
-          <a:bodyPr wrap="square" lIns="0" tIns="0" rIns="0" bIns="0" rtlCol="0" anchor="ctr"/>
-          <a:lstStyle/>
-          <a:p>
-            <a:pPr algn="ctr" indent="0" marL="0">
-              <a:buNone/>
-            </a:pPr>
-            <a:r>
-              <a:rPr lang="en-US" sz="1300" b="1" dirty="0">
-                <a:solidFill>
-                  <a:schemeClr val="bg1"/>
-                </a:solidFill>
-              </a:rPr>
-              <a:t>3</a:t>
-            </a:r>
-            <a:endParaRPr lang="en-US" sz="1300" dirty="0"/>
-          </a:p>
-        </p:txBody>
-      </p:sp>
-      <p:sp>
-        <p:nvSpPr>
-          <p:cNvPr id="22" name="path-text-2"/>
-          <p:cNvSpPr txBox="1"/>
-          <p:nvPr/>
-        </p:nvSpPr>
-        <p:spPr>
-          <a:xfrm>
-            <a:off x="8558784" y="5198364"/>
-            <a:ext cx="1417320" cy="685800"/>
-          </a:xfrm>
-          <a:prstGeom prst="rect">
-            <a:avLst/>
-          </a:prstGeom>
-          <a:noFill/>
-          <a:ln/>
-        </p:spPr>
-        <p:txBody>
-          <a:bodyPr wrap="square" lIns="0" tIns="0" rIns="0" bIns="0" rtlCol="0" anchor="ctr"/>
-          <a:lstStyle/>
-          <a:p>
-            <a:pPr indent="0" marL="0">
-              <a:buNone/>
-            </a:pPr>
-            <a:r>
-              <a:rPr lang="en-US" sz="1200" dirty="0">
-                <a:solidFill>
-                  <a:schemeClr val="tx2"/>
-                </a:solidFill>
-              </a:rPr>
-              <a:t>BRD + IMMOLS integration</a:t>
-            </a:r>
-            <a:endParaRPr lang="en-US" sz="1200" dirty="0"/>
-          </a:p>
-        </p:txBody>
-      </p:sp>
-      <p:sp>
-        <p:nvSpPr>
-          <p:cNvPr id="23" name="path-dot-3"/>
-          <p:cNvSpPr/>
-          <p:nvPr/>
-        </p:nvSpPr>
-        <p:spPr>
-          <a:xfrm>
-            <a:off x="10003536" y="5349240"/>
-            <a:ext cx="384048" cy="384048"/>
-          </a:xfrm>
-          <a:prstGeom prst="ellipse">
-            <a:avLst/>
-          </a:prstGeom>
-          <a:solidFill>
-            <a:schemeClr val="tx2"/>
-          </a:solidFill>
-          <a:ln w="12700">
-            <a:solidFill>
-              <a:schemeClr val="tx2"/>
-            </a:solidFill>
-            <a:prstDash val="solid"/>
-          </a:ln>
-        </p:spPr>
-      </p:sp>
-      <p:sp>
-        <p:nvSpPr>
-          <p:cNvPr id="24" name="path-num-3"/>
-          <p:cNvSpPr txBox="1"/>
-          <p:nvPr/>
-        </p:nvSpPr>
-        <p:spPr>
-          <a:xfrm>
-            <a:off x="10003536" y="5349240"/>
-            <a:ext cx="384048" cy="384048"/>
-          </a:xfrm>
-          <a:prstGeom prst="rect">
-            <a:avLst/>
-          </a:prstGeom>
-          <a:noFill/>
-          <a:ln/>
-        </p:spPr>
-        <p:txBody>
-          <a:bodyPr wrap="square" lIns="0" tIns="0" rIns="0" bIns="0" rtlCol="0" anchor="ctr"/>
-          <a:lstStyle/>
-          <a:p>
-            <a:pPr algn="ctr" indent="0" marL="0">
-              <a:buNone/>
-            </a:pPr>
-            <a:r>
-              <a:rPr lang="en-US" sz="1300" b="1" dirty="0">
-                <a:solidFill>
-                  <a:schemeClr val="bg1"/>
-                </a:solidFill>
-              </a:rPr>
-              <a:t>4</a:t>
-            </a:r>
-            <a:endParaRPr lang="en-US" sz="1300" dirty="0"/>
-          </a:p>
-        </p:txBody>
-      </p:sp>
-      <p:sp>
-        <p:nvSpPr>
-          <p:cNvPr id="25" name="path-text-3"/>
-          <p:cNvSpPr txBox="1"/>
-          <p:nvPr/>
-        </p:nvSpPr>
-        <p:spPr>
-          <a:xfrm>
-            <a:off x="10460736" y="5198364"/>
-            <a:ext cx="1417320" cy="685800"/>
-          </a:xfrm>
-          <a:prstGeom prst="rect">
-            <a:avLst/>
-          </a:prstGeom>
-          <a:noFill/>
-          <a:ln/>
-        </p:spPr>
-        <p:txBody>
-          <a:bodyPr wrap="square" lIns="0" tIns="0" rIns="0" bIns="0" rtlCol="0" anchor="ctr"/>
-          <a:lstStyle/>
-          <a:p>
-            <a:pPr indent="0" marL="0">
-              <a:buNone/>
-            </a:pPr>
-            <a:r>
-              <a:rPr lang="en-US" sz="1200" dirty="0">
-                <a:solidFill>
-                  <a:schemeClr val="tx2"/>
-                </a:solidFill>
-              </a:rPr>
-              <a:t>Command-wide rollout</a:t>
+              <a:t>Path to deployment: SIH prototype → pilot on one squadron’s historical exports → BRD + IMMOLS integration → command-wide rollout.</a:t>
             </a:r>
             <a:endParaRPr lang="en-US" sz="1200" dirty="0"/>
           </a:p>
@@ -5991,7 +5794,7 @@
                   <a:schemeClr val="accent2"/>
                 </a:solidFill>
               </a:rPr>
-              <a:t>≈ 5–6</a:t>
+              <a:t>≈ 13</a:t>
             </a:r>
             <a:endParaRPr lang="en-US" sz="4000" dirty="0"/>
           </a:p>
@@ -6027,7 +5830,7 @@
                   <a:schemeClr val="tx2"/>
                 </a:solidFill>
               </a:rPr>
-              <a:t>more mission-capable fighters for every +1 point of availability on a ~550-fighter fleet (illustrative)</a:t>
+              <a:t>more aircraft mission-capable every day from a 64-aircraft fleet in the prototype twin — same spares budget (notional data)</a:t>
             </a:r>
             <a:endParaRPr lang="en-US" sz="1300" dirty="0"/>
           </a:p>

--- a/docs/sih-ppt/TATPAR_SIH26249_Idea.pptx
+++ b/docs/sih-ppt/TATPAR_SIH26249_Idea.pptx
@@ -112,32 +112,32 @@
   <p:extLst>
     <p:ext uri="{521415D9-36F7-43E2-AB2F-B90AF26B5E84}">
       <p14:sectionLst xmlns:p14="http://schemas.microsoft.com/office/powerpoint/2010/main">
-        <p14:section name="Title" id="{df94ee4a-32a4-d1f5-d0ab-705beb095b15}">
+        <p14:section name="Title" id="{24b1f1ab-0bc2-ea47-3ecf-c784d85f5d82}">
           <p14:sldIdLst>
             <p14:sldId id="256"/>
           </p14:sldIdLst>
         </p14:section>
-        <p14:section name="Solution" id="{85dacdcb-feb7-a313-2bd0-974fbe3bcdd3}">
+        <p14:section name="Solution" id="{f15f1c7d-7ab8-31ec-0f19-30116a1b4716}">
           <p14:sldIdLst>
             <p14:sldId id="257"/>
           </p14:sldIdLst>
         </p14:section>
-        <p14:section name="Approach" id="{b134f335-ca55-52ea-dbe9-20a28e4048a3}">
+        <p14:section name="Approach" id="{ef444c20-8079-5b1b-228f-1253eb372ceb}">
           <p14:sldIdLst>
             <p14:sldId id="258"/>
           </p14:sldIdLst>
         </p14:section>
-        <p14:section name="Feasibility" id="{6bbd1751-37ef-0593-4cb8-8ae7dcb9c80c}">
+        <p14:section name="Feasibility" id="{6ca052b8-d59b-fa8e-38e9-fc16faa03a5f}">
           <p14:sldIdLst>
             <p14:sldId id="259"/>
           </p14:sldIdLst>
         </p14:section>
-        <p14:section name="Impact" id="{c308d545-47ea-c54b-3760-d8e6bdc14a42}">
+        <p14:section name="Impact" id="{d332b623-ee7a-26ac-8567-cbdcfb24355f}">
           <p14:sldIdLst>
             <p14:sldId id="260"/>
           </p14:sldIdLst>
         </p14:section>
-        <p14:section name="References" id="{887950e2-d65d-d0fc-3451-7d475ba495ca}">
+        <p14:section name="References" id="{ea43eeb8-71a7-2b13-2d70-7a2ddf75be4d}">
           <p14:sldIdLst>
             <p14:sldId id="261"/>
           </p14:sldIdLst>
@@ -5206,7 +5206,7 @@
       </p:graphicFrame>
       <p:pic>
         <p:nvPicPr>
-          <p:cNvPr id="13" name="shot-0" descr="/home/user/air-power/docs/sih-ppt/shot-planner.png">    </p:cNvPr>
+          <p:cNvPr id="13" name="shot-0" descr="/home/user/air-power/docs/sih-ppt/shot-state.png">    </p:cNvPr>
           <p:cNvPicPr>
             <a:picLocks noChangeAspect="1"/>
           </p:cNvPicPr>
@@ -5258,7 +5258,7 @@
                   <a:schemeClr val="accent6"/>
                 </a:solidFill>
               </a:rPr>
-              <a:t>Readiness planner</a:t>
+              <a:t>01 State board + daily signal</a:t>
             </a:r>
             <a:endParaRPr lang="en-US" sz="1100" dirty="0"/>
           </a:p>
@@ -5266,7 +5266,7 @@
       </p:sp>
       <p:pic>
         <p:nvPicPr>
-          <p:cNvPr id="15" name="shot-1" descr="/home/user/air-power/docs/sih-ppt/shot-flow.png">    </p:cNvPr>
+          <p:cNvPr id="15" name="shot-1" descr="/home/user/air-power/docs/sih-ppt/shot-planner.png">    </p:cNvPr>
           <p:cNvPicPr>
             <a:picLocks noChangeAspect="1"/>
           </p:cNvPicPr>
@@ -5318,7 +5318,7 @@
                   <a:schemeClr val="accent6"/>
                 </a:solidFill>
               </a:rPr>
-              <a:t>CP-SAT flight &amp; maintenance plan</a:t>
+              <a:t>02 Planning cell (P(meet) staircase)</a:t>
             </a:r>
             <a:endParaRPr lang="en-US" sz="1100" dirty="0"/>
           </a:p>
@@ -5378,7 +5378,7 @@
                   <a:schemeClr val="accent6"/>
                 </a:solidFill>
               </a:rPr>
-              <a:t>Engine RUL + module attribution</a:t>
+              <a:t>04 Airframe: drawing + engine RUL</a:t>
             </a:r>
             <a:endParaRPr lang="en-US" sz="1100" dirty="0"/>
           </a:p>

--- a/docs/sih-ppt/TATPAR_SIH26249_Idea.pptx
+++ b/docs/sih-ppt/TATPAR_SIH26249_Idea.pptx
@@ -112,32 +112,32 @@
   <p:extLst>
     <p:ext uri="{521415D9-36F7-43E2-AB2F-B90AF26B5E84}">
       <p14:sectionLst xmlns:p14="http://schemas.microsoft.com/office/powerpoint/2010/main">
-        <p14:section name="Title" id="{24b1f1ab-0bc2-ea47-3ecf-c784d85f5d82}">
+        <p14:section name="Title" id="{c9799bd6-d6b9-1dde-5dc0-2e4575c8f8ee}">
           <p14:sldIdLst>
             <p14:sldId id="256"/>
           </p14:sldIdLst>
         </p14:section>
-        <p14:section name="Solution" id="{f15f1c7d-7ab8-31ec-0f19-30116a1b4716}">
+        <p14:section name="Solution" id="{7c08ca7b-f93e-ce4a-6bdf-7e6d3df63e76}">
           <p14:sldIdLst>
             <p14:sldId id="257"/>
           </p14:sldIdLst>
         </p14:section>
-        <p14:section name="Approach" id="{ef444c20-8079-5b1b-228f-1253eb372ceb}">
+        <p14:section name="Approach" id="{40df29c1-2c5c-5c7e-a3b0-0c6e139510a3}">
           <p14:sldIdLst>
             <p14:sldId id="258"/>
           </p14:sldIdLst>
         </p14:section>
-        <p14:section name="Feasibility" id="{6ca052b8-d59b-fa8e-38e9-fc16faa03a5f}">
+        <p14:section name="Feasibility" id="{09e97808-f168-e1ac-1723-6da934f268ba}">
           <p14:sldIdLst>
             <p14:sldId id="259"/>
           </p14:sldIdLst>
         </p14:section>
-        <p14:section name="Impact" id="{d332b623-ee7a-26ac-8567-cbdcfb24355f}">
+        <p14:section name="Impact" id="{32a32ac3-ab12-a3d2-d795-21a08530ebb5}">
           <p14:sldIdLst>
             <p14:sldId id="260"/>
           </p14:sldIdLst>
         </p14:section>
-        <p14:section name="References" id="{ea43eeb8-71a7-2b13-2d70-7a2ddf75be4d}">
+        <p14:section name="References" id="{96d20cc5-a414-accf-71c5-8c304a357ea5}">
           <p14:sldIdLst>
             <p14:sldId id="261"/>
           </p14:sldIdLst>
@@ -722,7 +722,7 @@
           <a:p>
             <a:r>
               <a:rPr lang="en-US" dirty="0"/>
-              <a:t>Six layers: data fabric, intelligence, fleet twin, decision engines, experience, trust. The loop ends with human approval and learning from outcomes.</a:t>
+              <a:t>Six layers: data fabric, intelligence, fleet twin, decision engines, experience, trust. Unit data (HUMS, tech log, IMMOLS, BRD/HAL) is imported against published contracts and changes beliefs and the plan; models retrain offline.</a:t>
             </a:r>
             <a:endParaRPr lang="en-US" dirty="0"/>
           </a:p>
@@ -898,7 +898,7 @@
           <a:p>
             <a:r>
               <a:rPr lang="en-US" dirty="0"/>
-              <a:t>The first two figures are from open sources (see references). The third is measured in the TATPAR prototype on a notional fleet: +20.3 ± 0.5 points over one year, 24 hidden-truth futures.</a:t>
+              <a:t>The first two figures are from open sources (see references). The third is measured in the TATPAR prototype on a notional fleet: +20.2 ± 0.5 points over one year, 24 hidden-truth futures. Rupee figure: MoD–HAL contract of Dec 2024, ₹13,500 crore for 12 Su-30MKI with associated equipment (₹1,125 crore each) × 13; illustrative only.</a:t>
             </a:r>
             <a:endParaRPr lang="en-US" dirty="0"/>
           </a:p>
@@ -2499,12 +2499,12 @@
         </p:nvSpPr>
         <p:spPr>
           <a:xfrm>
-            <a:off x="457200" y="1828800"/>
-            <a:ext cx="6949440" cy="1371600"/>
+            <a:off x="457200" y="1783080"/>
+            <a:ext cx="6949440" cy="1225296"/>
           </a:xfrm>
           <a:prstGeom prst="roundRect">
             <a:avLst>
-              <a:gd name="adj" fmla="val 8000"/>
+              <a:gd name="adj" fmla="val 8955"/>
             </a:avLst>
           </a:prstGeom>
           <a:solidFill>
@@ -2526,7 +2526,7 @@
         </p:nvSpPr>
         <p:spPr>
           <a:xfrm>
-            <a:off x="685800" y="2103120"/>
+            <a:off x="685800" y="1984248"/>
             <a:ext cx="822960" cy="822960"/>
           </a:xfrm>
           <a:prstGeom prst="ellipse">
@@ -2559,7 +2559,7 @@
         </p:blipFill>
         <p:spPr>
           <a:xfrm>
-            <a:off x="883310" y="2300630"/>
+            <a:off x="883310" y="2181758"/>
             <a:ext cx="427939" cy="427939"/>
           </a:xfrm>
           <a:prstGeom prst="rect">
@@ -2575,8 +2575,8 @@
         </p:nvSpPr>
         <p:spPr>
           <a:xfrm>
-            <a:off x="1737360" y="1920240"/>
-            <a:ext cx="5486400" cy="1188720"/>
+            <a:off x="1737360" y="1828800"/>
+            <a:ext cx="5486400" cy="1133856"/>
           </a:xfrm>
           <a:prstGeom prst="rect">
             <a:avLst/>
@@ -2639,12 +2639,12 @@
         </p:nvSpPr>
         <p:spPr>
           <a:xfrm>
-            <a:off x="457200" y="3337560"/>
-            <a:ext cx="6949440" cy="1371600"/>
+            <a:off x="457200" y="3099816"/>
+            <a:ext cx="6949440" cy="1225296"/>
           </a:xfrm>
           <a:prstGeom prst="roundRect">
             <a:avLst>
-              <a:gd name="adj" fmla="val 8000"/>
+              <a:gd name="adj" fmla="val 8955"/>
             </a:avLst>
           </a:prstGeom>
           <a:solidFill>
@@ -2666,7 +2666,7 @@
         </p:nvSpPr>
         <p:spPr>
           <a:xfrm>
-            <a:off x="685800" y="3611880"/>
+            <a:off x="685800" y="3300984"/>
             <a:ext cx="822960" cy="822960"/>
           </a:xfrm>
           <a:prstGeom prst="ellipse">
@@ -2699,7 +2699,7 @@
         </p:blipFill>
         <p:spPr>
           <a:xfrm>
-            <a:off x="883310" y="3809390"/>
+            <a:off x="883310" y="3498494"/>
             <a:ext cx="427939" cy="427939"/>
           </a:xfrm>
           <a:prstGeom prst="rect">
@@ -2715,8 +2715,8 @@
         </p:nvSpPr>
         <p:spPr>
           <a:xfrm>
-            <a:off x="1737360" y="3429000"/>
-            <a:ext cx="5486400" cy="1188720"/>
+            <a:off x="1737360" y="3145536"/>
+            <a:ext cx="5486400" cy="1133856"/>
           </a:xfrm>
           <a:prstGeom prst="rect">
             <a:avLst/>
@@ -2779,12 +2779,12 @@
         </p:nvSpPr>
         <p:spPr>
           <a:xfrm>
-            <a:off x="457200" y="4846320"/>
-            <a:ext cx="6949440" cy="1371600"/>
+            <a:off x="457200" y="4416552"/>
+            <a:ext cx="6949440" cy="1225296"/>
           </a:xfrm>
           <a:prstGeom prst="roundRect">
             <a:avLst>
-              <a:gd name="adj" fmla="val 8000"/>
+              <a:gd name="adj" fmla="val 8955"/>
             </a:avLst>
           </a:prstGeom>
           <a:solidFill>
@@ -2806,7 +2806,7 @@
         </p:nvSpPr>
         <p:spPr>
           <a:xfrm>
-            <a:off x="685800" y="5120640"/>
+            <a:off x="685800" y="4617720"/>
             <a:ext cx="822960" cy="822960"/>
           </a:xfrm>
           <a:prstGeom prst="ellipse">
@@ -2839,7 +2839,7 @@
         </p:blipFill>
         <p:spPr>
           <a:xfrm>
-            <a:off x="883310" y="5318150"/>
+            <a:off x="883310" y="4815230"/>
             <a:ext cx="427939" cy="427939"/>
           </a:xfrm>
           <a:prstGeom prst="rect">
@@ -2855,8 +2855,8 @@
         </p:nvSpPr>
         <p:spPr>
           <a:xfrm>
-            <a:off x="1737360" y="4937760"/>
-            <a:ext cx="5486400" cy="1188720"/>
+            <a:off x="1737360" y="4462272"/>
+            <a:ext cx="5486400" cy="1133856"/>
           </a:xfrm>
           <a:prstGeom prst="rect">
             <a:avLst/>
@@ -2919,12 +2919,12 @@
         </p:nvSpPr>
         <p:spPr>
           <a:xfrm>
-            <a:off x="7680960" y="1828800"/>
-            <a:ext cx="4050792" cy="4389120"/>
+            <a:off x="7680960" y="1783080"/>
+            <a:ext cx="4050792" cy="3858768"/>
           </a:xfrm>
           <a:prstGeom prst="roundRect">
             <a:avLst>
-              <a:gd name="adj" fmla="val 2709"/>
+              <a:gd name="adj" fmla="val 2844"/>
             </a:avLst>
           </a:prstGeom>
           <a:solidFill>
@@ -2946,8 +2946,8 @@
         </p:nvSpPr>
         <p:spPr>
           <a:xfrm>
-            <a:off x="7955280" y="1965960"/>
-            <a:ext cx="3566160" cy="457200"/>
+            <a:off x="7955280" y="1892808"/>
+            <a:ext cx="3566160" cy="411480"/>
           </a:xfrm>
           <a:prstGeom prst="rect">
             <a:avLst/>
@@ -2982,8 +2982,8 @@
         </p:nvSpPr>
         <p:spPr>
           <a:xfrm>
-            <a:off x="7955280" y="2514600"/>
-            <a:ext cx="3611880" cy="3566160"/>
+            <a:off x="7955280" y="2377440"/>
+            <a:ext cx="3611880" cy="3200400"/>
           </a:xfrm>
           <a:prstGeom prst="rect">
             <a:avLst/>
@@ -2997,13 +2997,13 @@
           <a:p>
             <a:pPr marL="342900" indent="-342900">
               <a:spcAft>
-                <a:spcPts val="900"/>
+                <a:spcPts val="600"/>
               </a:spcAft>
               <a:buSzPct val="100000"/>
               <a:buChar char="•"/>
             </a:pPr>
             <a:r>
-              <a:rPr lang="en-US" sz="1400" b="1" dirty="0">
+              <a:rPr lang="en-US" sz="1300" b="1" dirty="0">
                 <a:solidFill>
                   <a:schemeClr val="bg1"/>
                 </a:solidFill>
@@ -3012,179 +3012,523 @@
             </a:r>
             <a:pPr indent="0" marL="0">
               <a:spcAft>
-                <a:spcPts val="900"/>
+                <a:spcPts val="600"/>
               </a:spcAft>
               <a:buNone/>
             </a:pPr>
             <a:r>
-              <a:rPr lang="en-US" sz="1400" dirty="0">
+              <a:rPr lang="en-US" sz="1300" dirty="0">
                 <a:solidFill>
                   <a:schemeClr val="bg2"/>
                 </a:solidFill>
               </a:rPr>
               <a:t> — not a 3D model of one aircraft</a:t>
             </a:r>
-            <a:endParaRPr lang="en-US" sz="1400" dirty="0"/>
+            <a:endParaRPr lang="en-US" sz="1300" dirty="0"/>
           </a:p>
           <a:p>
             <a:pPr marL="342900" indent="-342900">
               <a:spcAft>
-                <a:spcPts val="900"/>
+                <a:spcPts val="600"/>
               </a:spcAft>
               <a:buSzPct val="100000"/>
               <a:buChar char="•"/>
             </a:pPr>
             <a:r>
-              <a:rPr lang="en-US" sz="1400" b="1" dirty="0">
+              <a:rPr lang="en-US" sz="1300" b="1" dirty="0">
                 <a:solidFill>
                   <a:schemeClr val="bg1"/>
                 </a:solidFill>
               </a:rPr>
-              <a:t>Calibrated RUL</a:t>
+              <a:t>Plans backwards from the requirement</a:t>
             </a:r>
             <a:pPr indent="0" marL="0">
               <a:spcAft>
-                <a:spcPts val="900"/>
+                <a:spcPts val="600"/>
               </a:spcAft>
               <a:buNone/>
             </a:pPr>
             <a:r>
-              <a:rPr lang="en-US" sz="1400" dirty="0">
+              <a:rPr lang="en-US" sz="1300" dirty="0">
                 <a:solidFill>
                   <a:schemeClr val="bg2"/>
                 </a:solidFill>
               </a:rPr>
-              <a:t> — conformal 90 % intervals + engine-module attribution</a:t>
-            </a:r>
-            <a:endParaRPr lang="en-US" sz="1400" dirty="0"/>
+              <a:t> — each action scored by P(meet), checked against hidden truth</a:t>
+            </a:r>
+            <a:endParaRPr lang="en-US" sz="1300" dirty="0"/>
           </a:p>
           <a:p>
             <a:pPr marL="342900" indent="-342900">
               <a:spcAft>
-                <a:spcPts val="900"/>
+                <a:spcPts val="600"/>
               </a:spcAft>
               <a:buSzPct val="100000"/>
               <a:buChar char="•"/>
             </a:pPr>
             <a:r>
-              <a:rPr lang="en-US" sz="1400" b="1" dirty="0">
+              <a:rPr lang="en-US" sz="1300" b="1" dirty="0">
                 <a:solidFill>
                   <a:schemeClr val="bg1"/>
                 </a:solidFill>
               </a:rPr>
-              <a:t>Prognostics-aware flight &amp; maintenance planning</a:t>
+              <a:t>Live data fabric</a:t>
             </a:r>
             <a:pPr indent="0" marL="0">
               <a:spcAft>
-                <a:spcPts val="900"/>
+                <a:spcPts val="600"/>
               </a:spcAft>
               <a:buNone/>
             </a:pPr>
             <a:r>
-              <a:rPr lang="en-US" sz="1400" dirty="0">
+              <a:rPr lang="en-US" sz="1300" dirty="0">
                 <a:solidFill>
                   <a:schemeClr val="bg2"/>
                 </a:solidFill>
               </a:rPr>
-              <a:t> — staggered checks, bundled repairs</a:t>
-            </a:r>
-            <a:endParaRPr lang="en-US" sz="1400" dirty="0"/>
+              <a:t> — HUMS, tech log, IMMOLS, BRD/HAL imports change the plan</a:t>
+            </a:r>
+            <a:endParaRPr lang="en-US" sz="1300" dirty="0"/>
           </a:p>
           <a:p>
             <a:pPr marL="342900" indent="-342900">
               <a:spcAft>
-                <a:spcPts val="900"/>
+                <a:spcPts val="600"/>
               </a:spcAft>
               <a:buSzPct val="100000"/>
               <a:buChar char="•"/>
             </a:pPr>
             <a:r>
-              <a:rPr lang="en-US" sz="1400" b="1" dirty="0">
+              <a:rPr lang="en-US" sz="1300" b="1" dirty="0">
                 <a:solidFill>
                   <a:schemeClr val="bg1"/>
                 </a:solidFill>
               </a:rPr>
-              <a:t>Multi-echelon spares (VARI-METRIC)</a:t>
+              <a:t>Calibrated RUL</a:t>
             </a:r>
             <a:pPr indent="0" marL="0">
               <a:spcAft>
-                <a:spcPts val="900"/>
+                <a:spcPts val="600"/>
               </a:spcAft>
               <a:buNone/>
             </a:pPr>
             <a:r>
-              <a:rPr lang="en-US" sz="1400" dirty="0">
+              <a:rPr lang="en-US" sz="1300" dirty="0">
                 <a:solidFill>
                   <a:schemeClr val="bg2"/>
                 </a:solidFill>
               </a:rPr>
-              <a:t> fed by predicted demand</a:t>
-            </a:r>
-            <a:endParaRPr lang="en-US" sz="1400" dirty="0"/>
+              <a:t> — conformal 90 % intervals + engine-module attribution</a:t>
+            </a:r>
+            <a:endParaRPr lang="en-US" sz="1300" dirty="0"/>
           </a:p>
           <a:p>
             <a:pPr marL="342900" indent="-342900">
               <a:spcAft>
-                <a:spcPts val="900"/>
+                <a:spcPts val="600"/>
               </a:spcAft>
               <a:buSzPct val="100000"/>
               <a:buChar char="•"/>
             </a:pPr>
             <a:r>
-              <a:rPr lang="en-US" sz="1400" b="1" dirty="0">
+              <a:rPr lang="en-US" sz="1300" b="1" dirty="0">
                 <a:solidFill>
                   <a:schemeClr val="bg1"/>
                 </a:solidFill>
               </a:rPr>
-              <a:t>No-Fault-Found, rogue-unit &amp; cannibalisation</a:t>
+              <a:t>Multi-echelon spares (VARI-METRIC)</a:t>
             </a:r>
             <a:pPr indent="0" marL="0">
               <a:spcAft>
-                <a:spcPts val="900"/>
+                <a:spcPts val="600"/>
               </a:spcAft>
               <a:buNone/>
             </a:pPr>
             <a:r>
-              <a:rPr lang="en-US" sz="1400" dirty="0">
+              <a:rPr lang="en-US" sz="1300" dirty="0">
                 <a:solidFill>
                   <a:schemeClr val="bg2"/>
                 </a:solidFill>
               </a:rPr>
-              <a:t> analytics</a:t>
-            </a:r>
-            <a:endParaRPr lang="en-US" sz="1400" dirty="0"/>
+              <a:t>; NFF, rogue-unit &amp; cannibalisation analytics</a:t>
+            </a:r>
+            <a:endParaRPr lang="en-US" sz="1300" dirty="0"/>
           </a:p>
           <a:p>
             <a:pPr marL="342900" indent="-342900">
               <a:spcAft>
-                <a:spcPts val="900"/>
+                <a:spcPts val="600"/>
               </a:spcAft>
               <a:buSzPct val="100000"/>
               <a:buChar char="•"/>
             </a:pPr>
             <a:r>
-              <a:rPr lang="en-US" sz="1400" b="1" dirty="0">
+              <a:rPr lang="en-US" sz="1300" b="1" dirty="0">
                 <a:solidFill>
                   <a:schemeClr val="bg1"/>
                 </a:solidFill>
               </a:rPr>
-              <a:t>Indian base environment severity</a:t>
+              <a:t>Offline, federated, signed ledger</a:t>
             </a:r>
             <a:pPr indent="0" marL="0">
               <a:spcAft>
-                <a:spcPts val="900"/>
+                <a:spcPts val="600"/>
               </a:spcAft>
               <a:buNone/>
             </a:pPr>
             <a:r>
-              <a:rPr lang="en-US" sz="1400" dirty="0">
+              <a:rPr lang="en-US" sz="1300" dirty="0">
                 <a:solidFill>
                   <a:schemeClr val="bg2"/>
                 </a:solidFill>
               </a:rPr>
-              <a:t> from real dust data; offline &amp; federated</a:t>
-            </a:r>
-            <a:endParaRPr lang="en-US" sz="1400" dirty="0"/>
+              <a:t>; Indian base dust from real CAMS data</a:t>
+            </a:r>
+            <a:endParaRPr lang="en-US" sz="1300" dirty="0"/>
+          </a:p>
+        </p:txBody>
+      </p:sp>
+      <p:sp>
+        <p:nvSpPr>
+          <p:cNvPr id="19" name="ps-head"/>
+          <p:cNvSpPr txBox="1"/>
+          <p:nvPr/>
+        </p:nvSpPr>
+        <p:spPr>
+          <a:xfrm>
+            <a:off x="457200" y="5760720"/>
+            <a:ext cx="1417320" cy="530352"/>
+          </a:xfrm>
+          <a:prstGeom prst="rect">
+            <a:avLst/>
+          </a:prstGeom>
+          <a:noFill/>
+          <a:ln/>
+        </p:spPr>
+        <p:txBody>
+          <a:bodyPr wrap="square" lIns="0" tIns="0" rIns="0" bIns="0" rtlCol="0" anchor="ctr"/>
+          <a:lstStyle/>
+          <a:p>
+            <a:pPr indent="0" marL="0">
+              <a:buNone/>
+            </a:pPr>
+            <a:r>
+              <a:rPr lang="en-US" sz="1100" b="1" dirty="0">
+                <a:solidFill>
+                  <a:schemeClr val="accent1"/>
+                </a:solidFill>
+              </a:rPr>
+              <a:t>PS ASKS → TATPAR</a:t>
+            </a:r>
+            <a:endParaRPr lang="en-US" sz="1100" dirty="0"/>
+          </a:p>
+        </p:txBody>
+      </p:sp>
+      <p:sp>
+        <p:nvSpPr>
+          <p:cNvPr id="20" name="ps-0"/>
+          <p:cNvSpPr/>
+          <p:nvPr/>
+        </p:nvSpPr>
+        <p:spPr>
+          <a:xfrm>
+            <a:off x="1920240" y="5760720"/>
+            <a:ext cx="2377440" cy="530352"/>
+          </a:xfrm>
+          <a:prstGeom prst="roundRect">
+            <a:avLst>
+              <a:gd name="adj" fmla="val 20690"/>
+            </a:avLst>
+          </a:prstGeom>
+          <a:solidFill>
+            <a:schemeClr val="bg2"/>
+          </a:solidFill>
+          <a:ln w="12700">
+            <a:solidFill>
+              <a:schemeClr val="bg2"/>
+            </a:solidFill>
+            <a:prstDash val="solid"/>
+          </a:ln>
+        </p:spPr>
+      </p:sp>
+      <p:sp>
+        <p:nvSpPr>
+          <p:cNvPr id="21" name="ps-text-0"/>
+          <p:cNvSpPr txBox="1"/>
+          <p:nvPr/>
+        </p:nvSpPr>
+        <p:spPr>
+          <a:xfrm>
+            <a:off x="2011680" y="5769864"/>
+            <a:ext cx="2212848" cy="512064"/>
+          </a:xfrm>
+          <a:prstGeom prst="rect">
+            <a:avLst/>
+          </a:prstGeom>
+          <a:noFill/>
+          <a:ln/>
+        </p:spPr>
+        <p:txBody>
+          <a:bodyPr wrap="square" lIns="0" tIns="0" rIns="0" bIns="0" rtlCol="0" anchor="ctr"/>
+          <a:lstStyle/>
+          <a:p>
+            <a:pPr indent="0" marL="0">
+              <a:buNone/>
+            </a:pPr>
+            <a:r>
+              <a:rPr lang="en-US" sz="1100" b="1" dirty="0">
+                <a:solidFill>
+                  <a:schemeClr val="tx1"/>
+                </a:solidFill>
+              </a:rPr>
+              <a:t>AI/ML predictive maintenance</a:t>
+            </a:r>
+            <a:endParaRPr lang="en-US" sz="1100" dirty="0"/>
+          </a:p>
+          <a:p>
+            <a:pPr indent="0" marL="0">
+              <a:buNone/>
+            </a:pPr>
+            <a:r>
+              <a:rPr lang="en-US" sz="950" dirty="0">
+                <a:solidFill>
+                  <a:schemeClr val="tx2"/>
+                </a:solidFill>
+              </a:rPr>
+              <a:t>calibrated engine RUL, LRU survival, NFF &amp; rogue units</a:t>
+            </a:r>
+            <a:endParaRPr lang="en-US" sz="1100" dirty="0"/>
+          </a:p>
+        </p:txBody>
+      </p:sp>
+      <p:sp>
+        <p:nvSpPr>
+          <p:cNvPr id="22" name="ps-1"/>
+          <p:cNvSpPr/>
+          <p:nvPr/>
+        </p:nvSpPr>
+        <p:spPr>
+          <a:xfrm>
+            <a:off x="4389120" y="5760720"/>
+            <a:ext cx="2377440" cy="530352"/>
+          </a:xfrm>
+          <a:prstGeom prst="roundRect">
+            <a:avLst>
+              <a:gd name="adj" fmla="val 20690"/>
+            </a:avLst>
+          </a:prstGeom>
+          <a:solidFill>
+            <a:schemeClr val="bg2"/>
+          </a:solidFill>
+          <a:ln w="12700">
+            <a:solidFill>
+              <a:schemeClr val="bg2"/>
+            </a:solidFill>
+            <a:prstDash val="solid"/>
+          </a:ln>
+        </p:spPr>
+      </p:sp>
+      <p:sp>
+        <p:nvSpPr>
+          <p:cNvPr id="23" name="ps-text-1"/>
+          <p:cNvSpPr txBox="1"/>
+          <p:nvPr/>
+        </p:nvSpPr>
+        <p:spPr>
+          <a:xfrm>
+            <a:off x="4480560" y="5769864"/>
+            <a:ext cx="2212848" cy="512064"/>
+          </a:xfrm>
+          <a:prstGeom prst="rect">
+            <a:avLst/>
+          </a:prstGeom>
+          <a:noFill/>
+          <a:ln/>
+        </p:spPr>
+        <p:txBody>
+          <a:bodyPr wrap="square" lIns="0" tIns="0" rIns="0" bIns="0" rtlCol="0" anchor="ctr"/>
+          <a:lstStyle/>
+          <a:p>
+            <a:pPr indent="0" marL="0">
+              <a:buNone/>
+            </a:pPr>
+            <a:r>
+              <a:rPr lang="en-US" sz="1100" b="1" dirty="0">
+                <a:solidFill>
+                  <a:schemeClr val="tx1"/>
+                </a:solidFill>
+              </a:rPr>
+              <a:t>IoT / aircraft health monitoring</a:t>
+            </a:r>
+            <a:endParaRPr lang="en-US" sz="1100" dirty="0"/>
+          </a:p>
+          <a:p>
+            <a:pPr indent="0" marL="0">
+              <a:buNone/>
+            </a:pPr>
+            <a:r>
+              <a:rPr lang="en-US" sz="950" dirty="0">
+                <a:solidFill>
+                  <a:schemeClr val="tx2"/>
+                </a:solidFill>
+              </a:rPr>
+              <a:t>HUMS downloads imported live via an edge gateway</a:t>
+            </a:r>
+            <a:endParaRPr lang="en-US" sz="1100" dirty="0"/>
+          </a:p>
+        </p:txBody>
+      </p:sp>
+      <p:sp>
+        <p:nvSpPr>
+          <p:cNvPr id="24" name="ps-2"/>
+          <p:cNvSpPr/>
+          <p:nvPr/>
+        </p:nvSpPr>
+        <p:spPr>
+          <a:xfrm>
+            <a:off x="6858000" y="5760720"/>
+            <a:ext cx="2377440" cy="530352"/>
+          </a:xfrm>
+          <a:prstGeom prst="roundRect">
+            <a:avLst>
+              <a:gd name="adj" fmla="val 20690"/>
+            </a:avLst>
+          </a:prstGeom>
+          <a:solidFill>
+            <a:schemeClr val="bg2"/>
+          </a:solidFill>
+          <a:ln w="12700">
+            <a:solidFill>
+              <a:schemeClr val="bg2"/>
+            </a:solidFill>
+            <a:prstDash val="solid"/>
+          </a:ln>
+        </p:spPr>
+      </p:sp>
+      <p:sp>
+        <p:nvSpPr>
+          <p:cNvPr id="25" name="ps-text-2"/>
+          <p:cNvSpPr txBox="1"/>
+          <p:nvPr/>
+        </p:nvSpPr>
+        <p:spPr>
+          <a:xfrm>
+            <a:off x="6949440" y="5769864"/>
+            <a:ext cx="2212848" cy="512064"/>
+          </a:xfrm>
+          <a:prstGeom prst="rect">
+            <a:avLst/>
+          </a:prstGeom>
+          <a:noFill/>
+          <a:ln/>
+        </p:spPr>
+        <p:txBody>
+          <a:bodyPr wrap="square" lIns="0" tIns="0" rIns="0" bIns="0" rtlCol="0" anchor="ctr"/>
+          <a:lstStyle/>
+          <a:p>
+            <a:pPr indent="0" marL="0">
+              <a:buNone/>
+            </a:pPr>
+            <a:r>
+              <a:rPr lang="en-US" sz="1100" b="1" dirty="0">
+                <a:solidFill>
+                  <a:schemeClr val="tx1"/>
+                </a:solidFill>
+              </a:rPr>
+              <a:t>Digital twin</a:t>
+            </a:r>
+            <a:endParaRPr lang="en-US" sz="1100" dirty="0"/>
+          </a:p>
+          <a:p>
+            <a:pPr indent="0" marL="0">
+              <a:buNone/>
+            </a:pPr>
+            <a:r>
+              <a:rPr lang="en-US" sz="950" dirty="0">
+                <a:solidFill>
+                  <a:schemeClr val="tx2"/>
+                </a:solidFill>
+              </a:rPr>
+              <a:t>Fleet Twin of aircraft, spares, BRD/HAL, bays, crews</a:t>
+            </a:r>
+            <a:endParaRPr lang="en-US" sz="1100" dirty="0"/>
+          </a:p>
+        </p:txBody>
+      </p:sp>
+      <p:sp>
+        <p:nvSpPr>
+          <p:cNvPr id="26" name="ps-3"/>
+          <p:cNvSpPr/>
+          <p:nvPr/>
+        </p:nvSpPr>
+        <p:spPr>
+          <a:xfrm>
+            <a:off x="9326880" y="5760720"/>
+            <a:ext cx="2377440" cy="530352"/>
+          </a:xfrm>
+          <a:prstGeom prst="roundRect">
+            <a:avLst>
+              <a:gd name="adj" fmla="val 20690"/>
+            </a:avLst>
+          </a:prstGeom>
+          <a:solidFill>
+            <a:schemeClr val="bg2"/>
+          </a:solidFill>
+          <a:ln w="12700">
+            <a:solidFill>
+              <a:schemeClr val="bg2"/>
+            </a:solidFill>
+            <a:prstDash val="solid"/>
+          </a:ln>
+        </p:spPr>
+      </p:sp>
+      <p:sp>
+        <p:nvSpPr>
+          <p:cNvPr id="27" name="ps-text-3"/>
+          <p:cNvSpPr txBox="1"/>
+          <p:nvPr/>
+        </p:nvSpPr>
+        <p:spPr>
+          <a:xfrm>
+            <a:off x="9418320" y="5769864"/>
+            <a:ext cx="2212848" cy="512064"/>
+          </a:xfrm>
+          <a:prstGeom prst="rect">
+            <a:avLst/>
+          </a:prstGeom>
+          <a:noFill/>
+          <a:ln/>
+        </p:spPr>
+        <p:txBody>
+          <a:bodyPr wrap="square" lIns="0" tIns="0" rIns="0" bIns="0" rtlCol="0" anchor="ctr"/>
+          <a:lstStyle/>
+          <a:p>
+            <a:pPr indent="0" marL="0">
+              <a:buNone/>
+            </a:pPr>
+            <a:r>
+              <a:rPr lang="en-US" sz="1100" b="1" dirty="0">
+                <a:solidFill>
+                  <a:schemeClr val="tx1"/>
+                </a:solidFill>
+              </a:rPr>
+              <a:t>Integrated analytics platform</a:t>
+            </a:r>
+            <a:endParaRPr lang="en-US" sz="1100" dirty="0"/>
+          </a:p>
+          <a:p>
+            <a:pPr indent="0" marL="0">
+              <a:buNone/>
+            </a:pPr>
+            <a:r>
+              <a:rPr lang="en-US" sz="950" dirty="0">
+                <a:solidFill>
+                  <a:schemeClr val="tx2"/>
+                </a:solidFill>
+              </a:rPr>
+              <a:t>4 data sources joined; 8-board ops room; signed ledger</a:t>
+            </a:r>
+            <a:endParaRPr lang="en-US" sz="1100" dirty="0"/>
           </a:p>
         </p:txBody>
       </p:sp>
@@ -3411,14 +3755,14 @@
               <a:buNone/>
             </a:pPr>
             <a:r>
-              <a:rPr lang="en-US" sz="1300" b="1" dirty="0">
+              <a:rPr lang="en-US" sz="1250" b="1" dirty="0">
                 <a:solidFill>
                   <a:schemeClr val="accent2"/>
                 </a:solidFill>
               </a:rPr>
               <a:t>Prognostics</a:t>
             </a:r>
-            <a:endParaRPr lang="en-US" sz="1300" dirty="0"/>
+            <a:endParaRPr lang="en-US" sz="1250" dirty="0"/>
           </a:p>
           <a:p>
             <a:pPr indent="0" marL="0">
@@ -3428,14 +3772,14 @@
               <a:buNone/>
             </a:pPr>
             <a:r>
-              <a:rPr lang="en-US" sz="1300" dirty="0">
+              <a:rPr lang="en-US" sz="1250" dirty="0">
                 <a:solidFill>
                   <a:schemeClr val="tx2"/>
                 </a:solidFill>
               </a:rPr>
               <a:t>LightGBM quantile + conformal (CQR), SHAP, Weibull AFT (lifelines)</a:t>
             </a:r>
-            <a:endParaRPr lang="en-US" sz="1300" dirty="0"/>
+            <a:endParaRPr lang="en-US" sz="1250" dirty="0"/>
           </a:p>
           <a:p>
             <a:pPr indent="0" marL="0">
@@ -3445,14 +3789,14 @@
               <a:buNone/>
             </a:pPr>
             <a:r>
-              <a:rPr lang="en-US" sz="1300" b="1" dirty="0">
+              <a:rPr lang="en-US" sz="1250" b="1" dirty="0">
                 <a:solidFill>
                   <a:schemeClr val="accent2"/>
                 </a:solidFill>
               </a:rPr>
               <a:t>Twin &amp; optimisation</a:t>
             </a:r>
-            <a:endParaRPr lang="en-US" sz="1300" dirty="0"/>
+            <a:endParaRPr lang="en-US" sz="1250" dirty="0"/>
           </a:p>
           <a:p>
             <a:pPr indent="0" marL="0">
@@ -3462,14 +3806,14 @@
               <a:buNone/>
             </a:pPr>
             <a:r>
-              <a:rPr lang="en-US" sz="1300" dirty="0">
+              <a:rPr lang="en-US" sz="1250" dirty="0">
                 <a:solidFill>
                   <a:schemeClr val="tx2"/>
                 </a:solidFill>
               </a:rPr>
               <a:t>NumPy Monte-Carlo Fleet Twin, OR-Tools CP-SAT, VARI-METRIC</a:t>
             </a:r>
-            <a:endParaRPr lang="en-US" sz="1300" dirty="0"/>
+            <a:endParaRPr lang="en-US" sz="1250" dirty="0"/>
           </a:p>
           <a:p>
             <a:pPr indent="0" marL="0">
@@ -3479,14 +3823,14 @@
               <a:buNone/>
             </a:pPr>
             <a:r>
-              <a:rPr lang="en-US" sz="1300" b="1" dirty="0">
+              <a:rPr lang="en-US" sz="1250" b="1" dirty="0">
                 <a:solidFill>
                   <a:schemeClr val="accent2"/>
                 </a:solidFill>
               </a:rPr>
-              <a:t>Platform</a:t>
-            </a:r>
-            <a:endParaRPr lang="en-US" sz="1300" dirty="0"/>
+              <a:t>Data in</a:t>
+            </a:r>
+            <a:endParaRPr lang="en-US" sz="1250" dirty="0"/>
           </a:p>
           <a:p>
             <a:pPr indent="0" marL="0">
@@ -3496,14 +3840,14 @@
               <a:buNone/>
             </a:pPr>
             <a:r>
-              <a:rPr lang="en-US" sz="1300" dirty="0">
+              <a:rPr lang="en-US" sz="1250" dirty="0">
                 <a:solidFill>
                   <a:schemeClr val="tx2"/>
                 </a:solidFill>
               </a:rPr>
-              <a:t>FastAPI · React + TypeScript · ECharts · SQLite → Postgres/TimescaleDB</a:t>
-            </a:r>
-            <a:endParaRPr lang="en-US" sz="1300" dirty="0"/>
+              <a:t>CSV contracts + REST for HUMS, tech log, IMMOLS, BRD/HAL; HUMS edge gateway</a:t>
+            </a:r>
+            <a:endParaRPr lang="en-US" sz="1250" dirty="0"/>
           </a:p>
           <a:p>
             <a:pPr indent="0" marL="0">
@@ -3513,14 +3857,14 @@
               <a:buNone/>
             </a:pPr>
             <a:r>
-              <a:rPr lang="en-US" sz="1300" b="1" dirty="0">
+              <a:rPr lang="en-US" sz="1250" b="1" dirty="0">
                 <a:solidFill>
                   <a:schemeClr val="accent2"/>
                 </a:solidFill>
               </a:rPr>
-              <a:t>Data</a:t>
-            </a:r>
-            <a:endParaRPr lang="en-US" sz="1300" dirty="0"/>
+              <a:t>Platform</a:t>
+            </a:r>
+            <a:endParaRPr lang="en-US" sz="1250" dirty="0"/>
           </a:p>
           <a:p>
             <a:pPr indent="0" marL="0">
@@ -3530,14 +3874,14 @@
               <a:buNone/>
             </a:pPr>
             <a:r>
-              <a:rPr lang="en-US" sz="1300" dirty="0">
+              <a:rPr lang="en-US" sz="1250" dirty="0">
                 <a:solidFill>
                   <a:schemeClr val="tx2"/>
                 </a:solidFill>
               </a:rPr>
-              <a:t>NASA C-MAPSS, MaintNet logbooks, CAMS dust, notional synthetic fleet</a:t>
-            </a:r>
-            <a:endParaRPr lang="en-US" sz="1300" dirty="0"/>
+              <a:t>FastAPI · React + TypeScript · ECharts · Parquet (Postgres/TimescaleDB in production)</a:t>
+            </a:r>
+            <a:endParaRPr lang="en-US" sz="1250" dirty="0"/>
           </a:p>
           <a:p>
             <a:pPr indent="0" marL="0">
@@ -3547,14 +3891,14 @@
               <a:buNone/>
             </a:pPr>
             <a:r>
-              <a:rPr lang="en-US" sz="1300" b="1" dirty="0">
+              <a:rPr lang="en-US" sz="1250" b="1" dirty="0">
                 <a:solidFill>
                   <a:schemeClr val="accent2"/>
                 </a:solidFill>
               </a:rPr>
-              <a:t>Deploy</a:t>
-            </a:r>
-            <a:endParaRPr lang="en-US" sz="1300" dirty="0"/>
+              <a:t>Data</a:t>
+            </a:r>
+            <a:endParaRPr lang="en-US" sz="1250" dirty="0"/>
           </a:p>
           <a:p>
             <a:pPr indent="0" marL="0">
@@ -3564,14 +3908,48 @@
               <a:buNone/>
             </a:pPr>
             <a:r>
-              <a:rPr lang="en-US" sz="1300" dirty="0">
+              <a:rPr lang="en-US" sz="1250" dirty="0">
                 <a:solidFill>
                   <a:schemeClr val="tx2"/>
                 </a:solidFill>
               </a:rPr>
+              <a:t>NASA C-MAPSS, MaintNet logbooks, CAMS dust, notional synthetic fleet</a:t>
+            </a:r>
+            <a:endParaRPr lang="en-US" sz="1250" dirty="0"/>
+          </a:p>
+          <a:p>
+            <a:pPr indent="0" marL="0">
+              <a:spcAft>
+                <a:spcPts val="400"/>
+              </a:spcAft>
+              <a:buNone/>
+            </a:pPr>
+            <a:r>
+              <a:rPr lang="en-US" sz="1250" b="1" dirty="0">
+                <a:solidFill>
+                  <a:schemeClr val="accent2"/>
+                </a:solidFill>
+              </a:rPr>
+              <a:t>Deploy</a:t>
+            </a:r>
+            <a:endParaRPr lang="en-US" sz="1250" dirty="0"/>
+          </a:p>
+          <a:p>
+            <a:pPr indent="0" marL="0">
+              <a:spcAft>
+                <a:spcPts val="400"/>
+              </a:spcAft>
+              <a:buNone/>
+            </a:pPr>
+            <a:r>
+              <a:rPr lang="en-US" sz="1250" dirty="0">
+                <a:solidFill>
+                  <a:schemeClr val="tx2"/>
+                </a:solidFill>
+              </a:rPr>
               <a:t>Docker, fully offline on CPU laptop / edge server</a:t>
             </a:r>
-            <a:endParaRPr lang="en-US" sz="1300" dirty="0"/>
+            <a:endParaRPr lang="en-US" sz="1250" dirty="0"/>
           </a:p>
         </p:txBody>
       </p:sp>
@@ -4120,8 +4498,8 @@
         </p:nvSpPr>
         <p:spPr>
           <a:xfrm>
-            <a:off x="685800" y="1938528"/>
-            <a:ext cx="3154680" cy="749808"/>
+            <a:off x="685800" y="1920240"/>
+            <a:ext cx="3154680" cy="786384"/>
           </a:xfrm>
           <a:prstGeom prst="rect">
             <a:avLst/>
@@ -4137,14 +4515,14 @@
               <a:buNone/>
             </a:pPr>
             <a:r>
-              <a:rPr lang="en-US" sz="1300" dirty="0">
+              <a:rPr lang="en-US" sz="1250" dirty="0">
                 <a:solidFill>
                   <a:schemeClr val="tx2"/>
                 </a:solidFill>
               </a:rPr>
-              <a:t>mission-capable in the working prototype’s Fleet Twin: 57.7 → 78.0 %, same fleet and spares budget (notional data)</a:t>
-            </a:r>
-            <a:endParaRPr lang="en-US" sz="1300" dirty="0"/>
+              <a:t>mission-capable in the prototype’s Fleet Twin: 57.7 → 77.9 %, same fleet &amp; spares budget; +16 to +26 under every changed assumption (notional)</a:t>
+            </a:r>
+            <a:endParaRPr lang="en-US" sz="1250" dirty="0"/>
           </a:p>
         </p:txBody>
       </p:sp>
@@ -4219,8 +4597,8 @@
         </p:nvSpPr>
         <p:spPr>
           <a:xfrm>
-            <a:off x="685800" y="3621024"/>
-            <a:ext cx="3154680" cy="749808"/>
+            <a:off x="685800" y="3602736"/>
+            <a:ext cx="3154680" cy="786384"/>
           </a:xfrm>
           <a:prstGeom prst="rect">
             <a:avLst/>
@@ -4236,14 +4614,14 @@
               <a:buNone/>
             </a:pPr>
             <a:r>
-              <a:rPr lang="en-US" sz="1300" dirty="0">
+              <a:rPr lang="en-US" sz="1250" dirty="0">
                 <a:solidFill>
                   <a:schemeClr val="tx2"/>
                 </a:solidFill>
               </a:rPr>
               <a:t>calibrated engine-RUL interval coverage on NASA C-MAPSS test sets (82.7 % before conformal calibration)</a:t>
             </a:r>
-            <a:endParaRPr lang="en-US" sz="1300" dirty="0"/>
+            <a:endParaRPr lang="en-US" sz="1250" dirty="0"/>
           </a:p>
         </p:txBody>
       </p:sp>
@@ -4318,8 +4696,8 @@
         </p:nvSpPr>
         <p:spPr>
           <a:xfrm>
-            <a:off x="685800" y="5303520"/>
-            <a:ext cx="3154680" cy="749808"/>
+            <a:off x="685800" y="5285232"/>
+            <a:ext cx="3154680" cy="786384"/>
           </a:xfrm>
           <a:prstGeom prst="rect">
             <a:avLst/>
@@ -4335,14 +4713,14 @@
               <a:buNone/>
             </a:pPr>
             <a:r>
-              <a:rPr lang="en-US" sz="1300" dirty="0">
+              <a:rPr lang="en-US" sz="1250" dirty="0">
                 <a:solidFill>
                   <a:schemeClr val="tx2"/>
                 </a:solidFill>
               </a:rPr>
               <a:t>cloud dependencies — runs air-gapped on a CPU laptop or edge server; public + synthetic data only</a:t>
             </a:r>
-            <a:endParaRPr lang="en-US" sz="1300" dirty="0"/>
+            <a:endParaRPr lang="en-US" sz="1250" dirty="0"/>
           </a:p>
         </p:txBody>
       </p:sp>
@@ -4369,10 +4747,10 @@
             <a:tbl>
               <a:tblPr/>
               <a:tblGrid>
-                <a:gridCol w="2377440"/>
-                <a:gridCol w="5056632"/>
+                <a:gridCol w="2240280"/>
+                <a:gridCol w="5193792"/>
               </a:tblGrid>
-              <a:tr h="402336">
+              <a:tr h="384048">
                 <a:tc>
                   <a:txBody>
                     <a:bodyPr/>
@@ -4510,7 +4888,7 @@
                   </a:tcPr>
                 </a:tc>
               </a:tr>
-              <a:tr h="402336">
+              <a:tr h="384048">
                 <a:tc>
                   <a:txBody>
                     <a:bodyPr/>
@@ -4520,7 +4898,7 @@
                         <a:buNone/>
                       </a:pPr>
                       <a:r>
-                        <a:rPr lang="en-US" sz="1200" b="1" dirty="0">
+                        <a:rPr lang="en-US" sz="1150" b="1" dirty="0">
                           <a:solidFill>
                             <a:srgbClr val="0B1B33"/>
                           </a:solidFill>
@@ -4530,7 +4908,7 @@
                         </a:rPr>
                         <a:t>No access to real IAF data</a:t>
                       </a:r>
-                      <a:endParaRPr lang="en-US" sz="1200" dirty="0">
+                      <a:endParaRPr lang="en-US" sz="1150" dirty="0">
                         <a:latin typeface="Calibri" charset="0"/>
                         <a:ea typeface="Calibri" charset="0"/>
                         <a:cs typeface="Calibri" charset="0"/>
@@ -4588,7 +4966,7 @@
                         <a:buNone/>
                       </a:pPr>
                       <a:r>
-                        <a:rPr lang="en-US" sz="1200" dirty="0">
+                        <a:rPr lang="en-US" sz="1150" dirty="0">
                           <a:solidFill>
                             <a:srgbClr val="1E3A5F"/>
                           </a:solidFill>
@@ -4596,9 +4974,9 @@
                           <a:ea typeface="Calibri" pitchFamily="34" charset="-122"/>
                           <a:cs typeface="Calibri" pitchFamily="34" charset="-120"/>
                         </a:rPr>
-                        <a:t>Public datasets + synthetic fleet with hidden ground truth; adapters for IMMOLS / e-MMS exports</a:t>
+                        <a:t>Public data + synthetic fleet with hidden ground truth; data contracts let a unit import its own HUMS, e-MMS, IMMOLS, BRD exports</a:t>
                       </a:r>
-                      <a:endParaRPr lang="en-US" sz="1200" dirty="0">
+                      <a:endParaRPr lang="en-US" sz="1150" dirty="0">
                         <a:latin typeface="Calibri" charset="0"/>
                         <a:ea typeface="Calibri" charset="0"/>
                         <a:cs typeface="Calibri" charset="0"/>
@@ -4648,7 +5026,7 @@
                   </a:tcPr>
                 </a:tc>
               </a:tr>
-              <a:tr h="402336">
+              <a:tr h="384048">
                 <a:tc>
                   <a:txBody>
                     <a:bodyPr/>
@@ -4658,7 +5036,7 @@
                         <a:buNone/>
                       </a:pPr>
                       <a:r>
-                        <a:rPr lang="en-US" sz="1200" b="1" dirty="0">
+                        <a:rPr lang="en-US" sz="1150" b="1" dirty="0">
                           <a:solidFill>
                             <a:srgbClr val="0B1B33"/>
                           </a:solidFill>
@@ -4668,7 +5046,7 @@
                         </a:rPr>
                         <a:t>Trust in AI recommendations</a:t>
                       </a:r>
-                      <a:endParaRPr lang="en-US" sz="1200" dirty="0">
+                      <a:endParaRPr lang="en-US" sz="1150" dirty="0">
                         <a:latin typeface="Calibri" charset="0"/>
                         <a:ea typeface="Calibri" charset="0"/>
                         <a:cs typeface="Calibri" charset="0"/>
@@ -4726,7 +5104,7 @@
                         <a:buNone/>
                       </a:pPr>
                       <a:r>
-                        <a:rPr lang="en-US" sz="1200" dirty="0">
+                        <a:rPr lang="en-US" sz="1150" dirty="0">
                           <a:solidFill>
                             <a:srgbClr val="1E3A5F"/>
                           </a:solidFill>
@@ -4734,9 +5112,9 @@
                           <a:ea typeface="Calibri" pitchFamily="34" charset="-122"/>
                           <a:cs typeface="Calibri" pitchFamily="34" charset="-120"/>
                         </a:rPr>
-                        <a:t>Calibrated intervals, explanations, human approval, hash-chained audit log</a:t>
+                        <a:t>Calibrated intervals; planner checked against hidden truth; human approval; signed ledger</a:t>
                       </a:r>
-                      <a:endParaRPr lang="en-US" sz="1200" dirty="0">
+                      <a:endParaRPr lang="en-US" sz="1150" dirty="0">
                         <a:latin typeface="Calibri" charset="0"/>
                         <a:ea typeface="Calibri" charset="0"/>
                         <a:cs typeface="Calibri" charset="0"/>
@@ -4786,7 +5164,7 @@
                   </a:tcPr>
                 </a:tc>
               </a:tr>
-              <a:tr h="402336">
+              <a:tr h="384048">
                 <a:tc>
                   <a:txBody>
                     <a:bodyPr/>
@@ -4796,7 +5174,7 @@
                         <a:buNone/>
                       </a:pPr>
                       <a:r>
-                        <a:rPr lang="en-US" sz="1200" b="1" dirty="0">
+                        <a:rPr lang="en-US" sz="1150" b="1" dirty="0">
                           <a:solidFill>
                             <a:srgbClr val="0B1B33"/>
                           </a:solidFill>
@@ -4806,7 +5184,7 @@
                         </a:rPr>
                         <a:t>Classified, air-gapped networks</a:t>
                       </a:r>
-                      <a:endParaRPr lang="en-US" sz="1200" dirty="0">
+                      <a:endParaRPr lang="en-US" sz="1150" dirty="0">
                         <a:latin typeface="Calibri" charset="0"/>
                         <a:ea typeface="Calibri" charset="0"/>
                         <a:cs typeface="Calibri" charset="0"/>
@@ -4864,7 +5242,7 @@
                         <a:buNone/>
                       </a:pPr>
                       <a:r>
-                        <a:rPr lang="en-US" sz="1200" dirty="0">
+                        <a:rPr lang="en-US" sz="1150" dirty="0">
                           <a:solidFill>
                             <a:srgbClr val="1E3A5F"/>
                           </a:solidFill>
@@ -4872,9 +5250,9 @@
                           <a:ea typeface="Calibri" pitchFamily="34" charset="-122"/>
                           <a:cs typeface="Calibri" pitchFamily="34" charset="-120"/>
                         </a:rPr>
-                        <a:t>Fully offline; federated learning shares only model weights</a:t>
+                        <a:t>Fully offline (Docker); federated learning shares only weights + aggregate statistics</a:t>
                       </a:r>
-                      <a:endParaRPr lang="en-US" sz="1200" dirty="0">
+                      <a:endParaRPr lang="en-US" sz="1150" dirty="0">
                         <a:latin typeface="Calibri" charset="0"/>
                         <a:ea typeface="Calibri" charset="0"/>
                         <a:cs typeface="Calibri" charset="0"/>
@@ -4924,7 +5302,7 @@
                   </a:tcPr>
                 </a:tc>
               </a:tr>
-              <a:tr h="402336">
+              <a:tr h="384048">
                 <a:tc>
                   <a:txBody>
                     <a:bodyPr/>
@@ -4934,7 +5312,7 @@
                         <a:buNone/>
                       </a:pPr>
                       <a:r>
-                        <a:rPr lang="en-US" sz="1200" b="1" dirty="0">
+                        <a:rPr lang="en-US" sz="1150" b="1" dirty="0">
                           <a:solidFill>
                             <a:srgbClr val="0B1B33"/>
                           </a:solidFill>
@@ -4942,9 +5320,9 @@
                           <a:ea typeface="Calibri" pitchFamily="34" charset="-122"/>
                           <a:cs typeface="Calibri" pitchFamily="34" charset="-120"/>
                         </a:rPr>
-                        <a:t>Legacy and paper records</a:t>
+                        <a:t>Messy legacy records</a:t>
                       </a:r>
-                      <a:endParaRPr lang="en-US" sz="1200" dirty="0">
+                      <a:endParaRPr lang="en-US" sz="1150" dirty="0">
                         <a:latin typeface="Calibri" charset="0"/>
                         <a:ea typeface="Calibri" charset="0"/>
                         <a:cs typeface="Calibri" charset="0"/>
@@ -5002,7 +5380,7 @@
                         <a:buNone/>
                       </a:pPr>
                       <a:r>
-                        <a:rPr lang="en-US" sz="1200" dirty="0">
+                        <a:rPr lang="en-US" sz="1150" dirty="0">
                           <a:solidFill>
                             <a:srgbClr val="1E3A5F"/>
                           </a:solidFill>
@@ -5010,9 +5388,9 @@
                           <a:ea typeface="Calibri" pitchFamily="34" charset="-122"/>
                           <a:cs typeface="Calibri" pitchFamily="34" charset="-120"/>
                         </a:rPr>
-                        <a:t>Common data model (S5000F / ATA), CSV adapters, data-quality scores</a:t>
+                        <a:t>Row-by-row validation with reasons; data-quality scores; every import hashed and logged</a:t>
                       </a:r>
-                      <a:endParaRPr lang="en-US" sz="1200" dirty="0">
+                      <a:endParaRPr lang="en-US" sz="1150" dirty="0">
                         <a:latin typeface="Calibri" charset="0"/>
                         <a:ea typeface="Calibri" charset="0"/>
                         <a:cs typeface="Calibri" charset="0"/>
@@ -5062,7 +5440,7 @@
                   </a:tcPr>
                 </a:tc>
               </a:tr>
-              <a:tr h="402336">
+              <a:tr h="384048">
                 <a:tc>
                   <a:txBody>
                     <a:bodyPr/>
@@ -5072,7 +5450,7 @@
                         <a:buNone/>
                       </a:pPr>
                       <a:r>
-                        <a:rPr lang="en-US" sz="1200" b="1" dirty="0">
+                        <a:rPr lang="en-US" sz="1150" b="1" dirty="0">
                           <a:solidFill>
                             <a:srgbClr val="0B1B33"/>
                           </a:solidFill>
@@ -5082,7 +5460,7 @@
                         </a:rPr>
                         <a:t>Optimisation run-time</a:t>
                       </a:r>
-                      <a:endParaRPr lang="en-US" sz="1200" dirty="0">
+                      <a:endParaRPr lang="en-US" sz="1150" dirty="0">
                         <a:latin typeface="Calibri" charset="0"/>
                         <a:ea typeface="Calibri" charset="0"/>
                         <a:cs typeface="Calibri" charset="0"/>
@@ -5140,7 +5518,7 @@
                         <a:buNone/>
                       </a:pPr>
                       <a:r>
-                        <a:rPr lang="en-US" sz="1200" dirty="0">
+                        <a:rPr lang="en-US" sz="1150" dirty="0">
                           <a:solidFill>
                             <a:srgbClr val="1E3A5F"/>
                           </a:solidFill>
@@ -5148,9 +5526,9 @@
                           <a:ea typeface="Calibri" pitchFamily="34" charset="-122"/>
                           <a:cs typeface="Calibri" pitchFamily="34" charset="-120"/>
                         </a:rPr>
-                        <a:t>CP-SAT plans a squadron in ~1–2 s; rolling horizon, per-squadron decomposition</a:t>
+                        <a:t>CP-SAT plans a squadron in 0.3–3.5 s, same plan on every machine</a:t>
                       </a:r>
-                      <a:endParaRPr lang="en-US" sz="1200" dirty="0">
+                      <a:endParaRPr lang="en-US" sz="1150" dirty="0">
                         <a:latin typeface="Calibri" charset="0"/>
                         <a:ea typeface="Calibri" charset="0"/>
                         <a:cs typeface="Calibri" charset="0"/>
@@ -5204,40 +5582,43 @@
           </a:graphicData>
         </a:graphic>
       </p:graphicFrame>
-      <p:pic>
-        <p:nvPicPr>
-          <p:cNvPr id="13" name="shot-0" descr="/home/user/air-power/docs/sih-ppt/shot-state.png">    </p:cNvPr>
-          <p:cNvPicPr>
-            <a:picLocks noChangeAspect="1"/>
-          </p:cNvPicPr>
-          <p:nvPr/>
-        </p:nvPicPr>
-        <p:blipFill>
-          <a:blip r:embed="rId1"/>
-          <a:stretch>
-            <a:fillRect/>
-          </a:stretch>
-        </p:blipFill>
-        <p:spPr>
-          <a:xfrm>
-            <a:off x="4297680" y="3886200"/>
-            <a:ext cx="2377440" cy="1485900"/>
-          </a:xfrm>
-          <a:prstGeom prst="rect">
-            <a:avLst/>
-          </a:prstGeom>
-        </p:spPr>
-      </p:pic>
-      <p:sp>
-        <p:nvSpPr>
-          <p:cNvPr id="14" name="shot-cap-0"/>
+      <p:sp>
+        <p:nvSpPr>
+          <p:cNvPr id="13" name="phase-0"/>
+          <p:cNvSpPr/>
+          <p:nvPr/>
+        </p:nvSpPr>
+        <p:spPr>
+          <a:xfrm>
+            <a:off x="4297680" y="4114800"/>
+            <a:ext cx="2395728" cy="1188720"/>
+          </a:xfrm>
+          <a:prstGeom prst="roundRect">
+            <a:avLst>
+              <a:gd name="adj" fmla="val 9231"/>
+            </a:avLst>
+          </a:prstGeom>
+          <a:solidFill>
+            <a:schemeClr val="bg2"/>
+          </a:solidFill>
+          <a:ln w="12700">
+            <a:solidFill>
+              <a:schemeClr val="bg2"/>
+            </a:solidFill>
+            <a:prstDash val="solid"/>
+          </a:ln>
+        </p:spPr>
+      </p:sp>
+      <p:sp>
+        <p:nvSpPr>
+          <p:cNvPr id="14" name="phase-text-0"/>
           <p:cNvSpPr txBox="1"/>
           <p:nvPr/>
         </p:nvSpPr>
         <p:spPr>
           <a:xfrm>
-            <a:off x="4297680" y="5413248"/>
-            <a:ext cx="2377440" cy="274320"/>
+            <a:off x="4407408" y="4169664"/>
+            <a:ext cx="2194560" cy="1097280"/>
           </a:xfrm>
           <a:prstGeom prst="rect">
             <a:avLst/>
@@ -5246,58 +5627,75 @@
           <a:ln/>
         </p:spPr>
         <p:txBody>
-          <a:bodyPr wrap="square" lIns="0" tIns="0" rIns="0" bIns="0" rtlCol="0" anchor="ctr"/>
-          <a:lstStyle/>
-          <a:p>
-            <a:pPr indent="0" marL="0">
-              <a:buNone/>
-            </a:pPr>
-            <a:r>
-              <a:rPr lang="en-US" sz="1100" dirty="0">
-                <a:solidFill>
-                  <a:schemeClr val="accent6"/>
-                </a:solidFill>
-              </a:rPr>
-              <a:t>01 State board + daily signal</a:t>
-            </a:r>
-            <a:endParaRPr lang="en-US" sz="1100" dirty="0"/>
-          </a:p>
-        </p:txBody>
-      </p:sp>
-      <p:pic>
-        <p:nvPicPr>
-          <p:cNvPr id="15" name="shot-1" descr="/home/user/air-power/docs/sih-ppt/shot-planner.png">    </p:cNvPr>
-          <p:cNvPicPr>
-            <a:picLocks noChangeAspect="1"/>
-          </p:cNvPicPr>
-          <p:nvPr/>
-        </p:nvPicPr>
-        <p:blipFill>
-          <a:blip r:embed="rId2"/>
-          <a:stretch>
-            <a:fillRect/>
-          </a:stretch>
-        </p:blipFill>
-        <p:spPr>
-          <a:xfrm>
-            <a:off x="6825996" y="3886200"/>
-            <a:ext cx="2377440" cy="1485900"/>
-          </a:xfrm>
-          <a:prstGeom prst="rect">
-            <a:avLst/>
-          </a:prstGeom>
-        </p:spPr>
-      </p:pic>
-      <p:sp>
-        <p:nvSpPr>
-          <p:cNvPr id="16" name="shot-cap-1"/>
+          <a:bodyPr wrap="square" lIns="0" tIns="0" rIns="0" bIns="0" rtlCol="0" anchor="t"/>
+          <a:lstStyle/>
+          <a:p>
+            <a:pPr indent="0" marL="0">
+              <a:buNone/>
+            </a:pPr>
+            <a:r>
+              <a:rPr lang="en-US" sz="1200" b="1" dirty="0">
+                <a:solidFill>
+                  <a:schemeClr val="accent2"/>
+                </a:solidFill>
+              </a:rPr>
+              <a:t>0–3 months · Pilot</a:t>
+            </a:r>
+            <a:endParaRPr lang="en-US" sz="1200" dirty="0"/>
+          </a:p>
+          <a:p>
+            <a:pPr indent="0" marL="0">
+              <a:buNone/>
+            </a:pPr>
+            <a:r>
+              <a:rPr lang="en-US" sz="1050" dirty="0">
+                <a:solidFill>
+                  <a:schemeClr val="tx2"/>
+                </a:solidFill>
+              </a:rPr>
+              <a:t>One squadron's historical HUMS, e-MMS and IMMOLS exports mapped onto the contracts; models retrained; recommendations in shadow mode</a:t>
+            </a:r>
+            <a:endParaRPr lang="en-US" sz="1200" dirty="0"/>
+          </a:p>
+        </p:txBody>
+      </p:sp>
+      <p:sp>
+        <p:nvSpPr>
+          <p:cNvPr id="15" name="phase-1"/>
+          <p:cNvSpPr/>
+          <p:nvPr/>
+        </p:nvSpPr>
+        <p:spPr>
+          <a:xfrm>
+            <a:off x="6825996" y="4114800"/>
+            <a:ext cx="2395728" cy="1188720"/>
+          </a:xfrm>
+          <a:prstGeom prst="roundRect">
+            <a:avLst>
+              <a:gd name="adj" fmla="val 9231"/>
+            </a:avLst>
+          </a:prstGeom>
+          <a:solidFill>
+            <a:schemeClr val="bg2"/>
+          </a:solidFill>
+          <a:ln w="12700">
+            <a:solidFill>
+              <a:schemeClr val="bg2"/>
+            </a:solidFill>
+            <a:prstDash val="solid"/>
+          </a:ln>
+        </p:spPr>
+      </p:sp>
+      <p:sp>
+        <p:nvSpPr>
+          <p:cNvPr id="16" name="phase-text-1"/>
           <p:cNvSpPr txBox="1"/>
           <p:nvPr/>
         </p:nvSpPr>
         <p:spPr>
           <a:xfrm>
-            <a:off x="6825996" y="5413248"/>
-            <a:ext cx="2377440" cy="274320"/>
+            <a:off x="6935724" y="4169664"/>
+            <a:ext cx="2194560" cy="1097280"/>
           </a:xfrm>
           <a:prstGeom prst="rect">
             <a:avLst/>
@@ -5306,58 +5704,75 @@
           <a:ln/>
         </p:spPr>
         <p:txBody>
-          <a:bodyPr wrap="square" lIns="0" tIns="0" rIns="0" bIns="0" rtlCol="0" anchor="ctr"/>
-          <a:lstStyle/>
-          <a:p>
-            <a:pPr indent="0" marL="0">
-              <a:buNone/>
-            </a:pPr>
-            <a:r>
-              <a:rPr lang="en-US" sz="1100" dirty="0">
-                <a:solidFill>
-                  <a:schemeClr val="accent6"/>
-                </a:solidFill>
-              </a:rPr>
-              <a:t>02 Planning cell (P(meet) staircase)</a:t>
-            </a:r>
-            <a:endParaRPr lang="en-US" sz="1100" dirty="0"/>
-          </a:p>
-        </p:txBody>
-      </p:sp>
-      <p:pic>
-        <p:nvPicPr>
-          <p:cNvPr id="17" name="shot-2" descr="/home/user/air-power/docs/sih-ppt/shot-aircraft.png">    </p:cNvPr>
-          <p:cNvPicPr>
-            <a:picLocks noChangeAspect="1"/>
-          </p:cNvPicPr>
-          <p:nvPr/>
-        </p:nvPicPr>
-        <p:blipFill>
-          <a:blip r:embed="rId3"/>
-          <a:stretch>
-            <a:fillRect/>
-          </a:stretch>
-        </p:blipFill>
-        <p:spPr>
-          <a:xfrm>
-            <a:off x="9354312" y="3886200"/>
-            <a:ext cx="2377440" cy="1485900"/>
-          </a:xfrm>
-          <a:prstGeom prst="rect">
-            <a:avLst/>
-          </a:prstGeom>
-        </p:spPr>
-      </p:pic>
-      <p:sp>
-        <p:nvSpPr>
-          <p:cNvPr id="18" name="shot-cap-2"/>
+          <a:bodyPr wrap="square" lIns="0" tIns="0" rIns="0" bIns="0" rtlCol="0" anchor="t"/>
+          <a:lstStyle/>
+          <a:p>
+            <a:pPr indent="0" marL="0">
+              <a:buNone/>
+            </a:pPr>
+            <a:r>
+              <a:rPr lang="en-US" sz="1200" b="1" dirty="0">
+                <a:solidFill>
+                  <a:schemeClr val="accent2"/>
+                </a:solidFill>
+              </a:rPr>
+              <a:t>3–9 months · One station</a:t>
+            </a:r>
+            <a:endParaRPr lang="en-US" sz="1200" dirty="0"/>
+          </a:p>
+          <a:p>
+            <a:pPr indent="0" marL="0">
+              <a:buNone/>
+            </a:pPr>
+            <a:r>
+              <a:rPr lang="en-US" sz="1050" dirty="0">
+                <a:solidFill>
+                  <a:schemeClr val="tx2"/>
+                </a:solidFill>
+              </a:rPr>
+              <a:t>Daily signal, planner and orders in use; BRD/HAL status feed; MC rate measured against the station's own baseline</a:t>
+            </a:r>
+            <a:endParaRPr lang="en-US" sz="1200" dirty="0"/>
+          </a:p>
+        </p:txBody>
+      </p:sp>
+      <p:sp>
+        <p:nvSpPr>
+          <p:cNvPr id="17" name="phase-2"/>
+          <p:cNvSpPr/>
+          <p:nvPr/>
+        </p:nvSpPr>
+        <p:spPr>
+          <a:xfrm>
+            <a:off x="9354312" y="4114800"/>
+            <a:ext cx="2395728" cy="1188720"/>
+          </a:xfrm>
+          <a:prstGeom prst="roundRect">
+            <a:avLst>
+              <a:gd name="adj" fmla="val 9231"/>
+            </a:avLst>
+          </a:prstGeom>
+          <a:solidFill>
+            <a:schemeClr val="bg2"/>
+          </a:solidFill>
+          <a:ln w="12700">
+            <a:solidFill>
+              <a:schemeClr val="bg2"/>
+            </a:solidFill>
+            <a:prstDash val="solid"/>
+          </a:ln>
+        </p:spPr>
+      </p:sp>
+      <p:sp>
+        <p:nvSpPr>
+          <p:cNvPr id="18" name="phase-text-2"/>
           <p:cNvSpPr txBox="1"/>
           <p:nvPr/>
         </p:nvSpPr>
         <p:spPr>
           <a:xfrm>
-            <a:off x="9354312" y="5413248"/>
-            <a:ext cx="2377440" cy="274320"/>
+            <a:off x="9464040" y="4169664"/>
+            <a:ext cx="2194560" cy="1097280"/>
           </a:xfrm>
           <a:prstGeom prst="rect">
             <a:avLst/>
@@ -5366,21 +5781,35 @@
           <a:ln/>
         </p:spPr>
         <p:txBody>
-          <a:bodyPr wrap="square" lIns="0" tIns="0" rIns="0" bIns="0" rtlCol="0" anchor="ctr"/>
-          <a:lstStyle/>
-          <a:p>
-            <a:pPr indent="0" marL="0">
-              <a:buNone/>
-            </a:pPr>
-            <a:r>
-              <a:rPr lang="en-US" sz="1100" dirty="0">
-                <a:solidFill>
-                  <a:schemeClr val="accent6"/>
-                </a:solidFill>
-              </a:rPr>
-              <a:t>04 Airframe: drawing + engine RUL</a:t>
-            </a:r>
-            <a:endParaRPr lang="en-US" sz="1100" dirty="0"/>
+          <a:bodyPr wrap="square" lIns="0" tIns="0" rIns="0" bIns="0" rtlCol="0" anchor="t"/>
+          <a:lstStyle/>
+          <a:p>
+            <a:pPr indent="0" marL="0">
+              <a:buNone/>
+            </a:pPr>
+            <a:r>
+              <a:rPr lang="en-US" sz="1200" b="1" dirty="0">
+                <a:solidFill>
+                  <a:schemeClr val="accent2"/>
+                </a:solidFill>
+              </a:rPr>
+              <a:t>9–18 months · Command</a:t>
+            </a:r>
+            <a:endParaRPr lang="en-US" sz="1200" dirty="0"/>
+          </a:p>
+          <a:p>
+            <a:pPr indent="0" marL="0">
+              <a:buNone/>
+            </a:pPr>
+            <a:r>
+              <a:rPr lang="en-US" sz="1050" dirty="0">
+                <a:solidFill>
+                  <a:schemeClr val="tx2"/>
+                </a:solidFill>
+              </a:rPr>
+              <a:t>All bases; federated learning over AFNET; PKI-signed ledger; integration with IMMOLS / e-MMS</a:t>
+            </a:r>
+            <a:endParaRPr lang="en-US" sz="1200" dirty="0"/>
           </a:p>
         </p:txBody>
       </p:sp>
@@ -5392,8 +5821,8 @@
         </p:nvSpPr>
         <p:spPr>
           <a:xfrm>
-            <a:off x="4297680" y="5760720"/>
-            <a:ext cx="7434072" cy="502920"/>
+            <a:off x="4297680" y="5413248"/>
+            <a:ext cx="7434072" cy="822960"/>
           </a:xfrm>
           <a:prstGeom prst="rect">
             <a:avLst/>
@@ -5409,25 +5838,47 @@
               <a:buNone/>
             </a:pPr>
             <a:r>
-              <a:rPr lang="en-US" sz="1200" b="1" dirty="0">
+              <a:rPr lang="en-US" sz="1150" b="1" dirty="0">
                 <a:solidFill>
                   <a:schemeClr val="tx1"/>
                 </a:solidFill>
               </a:rPr>
-              <a:t>Working prototype built. </a:t>
-            </a:r>
-            <a:pPr indent="0" marL="0">
-              <a:buNone/>
-            </a:pPr>
-            <a:r>
-              <a:rPr lang="en-US" sz="1200" dirty="0">
+              <a:t>Cost (indicative): </a:t>
+            </a:r>
+            <a:pPr indent="0" marL="0">
+              <a:buNone/>
+            </a:pPr>
+            <a:r>
+              <a:rPr lang="en-US" sz="1150" dirty="0">
                 <a:solidFill>
                   <a:schemeClr val="tx2"/>
                 </a:solidFill>
               </a:rPr>
-              <a:t>Path to deployment: SIH prototype → pilot on one squadron’s historical exports → BRD + IMMOLS integration → command-wide rollout.</a:t>
-            </a:r>
-            <a:endParaRPr lang="en-US" sz="1200" dirty="0"/>
+              <a:t>one CPU edge server per station (~₹3–5 lakh); open-source stack, no licence fees. </a:t>
+            </a:r>
+            <a:pPr indent="0" marL="0">
+              <a:buNone/>
+            </a:pPr>
+            <a:r>
+              <a:rPr lang="en-US" sz="1150" b="1" dirty="0">
+                <a:solidFill>
+                  <a:schemeClr val="tx1"/>
+                </a:solidFill>
+              </a:rPr>
+              <a:t>Built and tested: </a:t>
+            </a:r>
+            <a:pPr indent="0" marL="0">
+              <a:buNone/>
+            </a:pPr>
+            <a:r>
+              <a:rPr lang="en-US" sz="1150" dirty="0">
+                <a:solidFill>
+                  <a:schemeClr val="tx2"/>
+                </a:solidFill>
+              </a:rPr>
+              <a:t>8-board ops room, 50 backend tests + 24 browser checks in CI · github.com/DeepakSinghhh/air-power</a:t>
+            </a:r>
+            <a:endParaRPr lang="en-US" sz="1150" dirty="0"/>
           </a:p>
         </p:txBody>
       </p:sp>
@@ -5632,7 +6083,7 @@
                   <a:schemeClr val="tx2"/>
                 </a:solidFill>
               </a:rPr>
-              <a:t>of fighters reported unserviceable at any time (post-Op Sindoor commentary)</a:t>
+              <a:t>of fighters reported unserviceable at any time (post-Op Sindoor commentary, Swarajya 2025)</a:t>
             </a:r>
             <a:endParaRPr lang="en-US" sz="1300" dirty="0"/>
           </a:p>
@@ -5695,7 +6146,7 @@
                   <a:schemeClr val="accent4"/>
                 </a:solidFill>
               </a:rPr>
-              <a:t>20–70 %</a:t>
+              <a:t>20–50 %</a:t>
             </a:r>
             <a:endParaRPr lang="en-US" sz="4000" dirty="0"/>
           </a:p>
@@ -5731,7 +6182,7 @@
                   <a:schemeClr val="tx2"/>
                 </a:solidFill>
               </a:rPr>
-              <a:t>of military avionics removals end as No-Fault-Found — wasted spares and repair slots</a:t>
+              <a:t>of avionics removals end as No-Fault-Found — wasted spares and repair slots (Raza 2018)</a:t>
             </a:r>
             <a:endParaRPr lang="en-US" sz="1300" dirty="0"/>
           </a:p>
@@ -6487,7 +6938,7 @@
                   <a:schemeClr val="tx2"/>
                 </a:solidFill>
               </a:rPr>
-              <a:t>Spares bought for availability per rupee; fewer NFF and repeat repairs</a:t>
+              <a:t>≈13 aircraft of availability ≈ ₹14,600 cr of new airframes at the 2024 HAL price (illustrative); spares bought for availability per rupee</a:t>
             </a:r>
             <a:endParaRPr lang="en-US" sz="1300" dirty="0"/>
           </a:p>
@@ -6870,8 +7321,8 @@
         </p:nvSpPr>
         <p:spPr>
           <a:xfrm>
-            <a:off x="685800" y="1828800"/>
-            <a:ext cx="3246120" cy="2926080"/>
+            <a:off x="685800" y="1783080"/>
+            <a:ext cx="3246120" cy="3017520"/>
           </a:xfrm>
           <a:prstGeom prst="rect">
             <a:avLst/>
@@ -6885,74 +7336,110 @@
           <a:p>
             <a:pPr marL="342900" indent="-342900">
               <a:spcAft>
-                <a:spcPts val="800"/>
+                <a:spcPts val="500"/>
               </a:spcAft>
               <a:buSzPct val="100000"/>
               <a:buChar char="•"/>
             </a:pPr>
             <a:r>
-              <a:rPr lang="en-US" sz="1400" dirty="0">
+              <a:rPr lang="en-US" sz="1250" dirty="0">
                 <a:solidFill>
                   <a:schemeClr val="bg1"/>
                 </a:solidFill>
               </a:rPr>
               <a:t>Business Standard (2014) — Su‑30MKI serviceability 48–55 %</a:t>
             </a:r>
-            <a:endParaRPr lang="en-US" sz="1400" dirty="0"/>
+            <a:endParaRPr lang="en-US" sz="1250" dirty="0"/>
           </a:p>
           <a:p>
             <a:pPr marL="342900" indent="-342900">
               <a:spcAft>
-                <a:spcPts val="800"/>
+                <a:spcPts val="500"/>
               </a:spcAft>
               <a:buSzPct val="100000"/>
               <a:buChar char="•"/>
             </a:pPr>
             <a:r>
-              <a:rPr lang="en-US" sz="1400" dirty="0">
+              <a:rPr lang="en-US" sz="1250" dirty="0">
                 <a:solidFill>
                   <a:schemeClr val="bg1"/>
                 </a:solidFill>
               </a:rPr>
               <a:t>CAPS Issue Brief 08/25 — AI in IAF logistics, IMMOLS, e-MMS</a:t>
             </a:r>
-            <a:endParaRPr lang="en-US" sz="1400" dirty="0"/>
+            <a:endParaRPr lang="en-US" sz="1250" dirty="0"/>
           </a:p>
           <a:p>
             <a:pPr marL="342900" indent="-342900">
               <a:spcAft>
-                <a:spcPts val="800"/>
+                <a:spcPts val="500"/>
               </a:spcAft>
               <a:buSzPct val="100000"/>
               <a:buChar char="•"/>
             </a:pPr>
             <a:r>
-              <a:rPr lang="en-US" sz="1400" dirty="0">
+              <a:rPr lang="en-US" sz="1250" dirty="0">
                 <a:solidFill>
                   <a:schemeClr val="bg1"/>
                 </a:solidFill>
               </a:rPr>
               <a:t>The Week (Aug 2026) — ML for Sukhoi and Tejas fleets, edge AI</a:t>
             </a:r>
-            <a:endParaRPr lang="en-US" sz="1400" dirty="0"/>
+            <a:endParaRPr lang="en-US" sz="1250" dirty="0"/>
           </a:p>
           <a:p>
             <a:pPr marL="342900" indent="-342900">
               <a:spcAft>
-                <a:spcPts val="800"/>
+                <a:spcPts val="500"/>
               </a:spcAft>
               <a:buSzPct val="100000"/>
               <a:buChar char="•"/>
             </a:pPr>
             <a:r>
-              <a:rPr lang="en-US" sz="1400" dirty="0">
+              <a:rPr lang="en-US" sz="1250" dirty="0">
                 <a:solidFill>
                   <a:schemeClr val="bg1"/>
                 </a:solidFill>
               </a:rPr>
               <a:t>Defense Mirror — 11 BRD Ojhar Su‑30MKI overhaul</a:t>
             </a:r>
-            <a:endParaRPr lang="en-US" sz="1400" dirty="0"/>
+            <a:endParaRPr lang="en-US" sz="1250" dirty="0"/>
+          </a:p>
+          <a:p>
+            <a:pPr marL="342900" indent="-342900">
+              <a:spcAft>
+                <a:spcPts val="500"/>
+              </a:spcAft>
+              <a:buSzPct val="100000"/>
+              <a:buChar char="•"/>
+            </a:pPr>
+            <a:r>
+              <a:rPr lang="en-US" sz="1250" dirty="0">
+                <a:solidFill>
+                  <a:schemeClr val="bg1"/>
+                </a:solidFill>
+              </a:rPr>
+              <a:t>Swarajya (2025) — Op Sindoor: ~40 % unserviceable</a:t>
+            </a:r>
+            <a:endParaRPr lang="en-US" sz="1250" dirty="0"/>
+          </a:p>
+          <a:p>
+            <a:pPr marL="342900" indent="-342900">
+              <a:spcAft>
+                <a:spcPts val="500"/>
+              </a:spcAft>
+              <a:buSzPct val="100000"/>
+              <a:buChar char="•"/>
+            </a:pPr>
+            <a:r>
+              <a:rPr lang="en-US" sz="1250" dirty="0">
+                <a:solidFill>
+                  <a:schemeClr val="bg1"/>
+                </a:solidFill>
+              </a:rPr>
+              <a:t>MoD–HAL contract, 12 Su‑30MKI, ₹13,500 cr (Dec 2024)</a:t>
+            </a:r>
+            <a:endParaRPr lang="en-US" sz="1250" dirty="0"/>
           </a:p>
         </p:txBody>
       </p:sp>
@@ -7027,8 +7514,8 @@
         </p:nvSpPr>
         <p:spPr>
           <a:xfrm>
-            <a:off x="4507992" y="1828800"/>
-            <a:ext cx="3246120" cy="2926080"/>
+            <a:off x="4507992" y="1783080"/>
+            <a:ext cx="3246120" cy="3017520"/>
           </a:xfrm>
           <a:prstGeom prst="rect">
             <a:avLst/>
@@ -7042,92 +7529,92 @@
           <a:p>
             <a:pPr marL="342900" indent="-342900">
               <a:spcAft>
-                <a:spcPts val="800"/>
+                <a:spcPts val="500"/>
               </a:spcAft>
               <a:buSzPct val="100000"/>
               <a:buChar char="•"/>
             </a:pPr>
             <a:r>
-              <a:rPr lang="en-US" sz="1400" dirty="0">
+              <a:rPr lang="en-US" sz="1250" dirty="0">
                 <a:solidFill>
                   <a:schemeClr val="bg1"/>
                 </a:solidFill>
               </a:rPr>
               <a:t>Kozanidis — Flight &amp; maintenance planning, Hellenic AF</a:t>
             </a:r>
-            <a:endParaRPr lang="en-US" sz="1400" dirty="0"/>
+            <a:endParaRPr lang="en-US" sz="1250" dirty="0"/>
           </a:p>
           <a:p>
             <a:pPr marL="342900" indent="-342900">
               <a:spcAft>
-                <a:spcPts val="800"/>
+                <a:spcPts val="500"/>
               </a:spcAft>
               <a:buSzPct val="100000"/>
               <a:buChar char="•"/>
             </a:pPr>
             <a:r>
-              <a:rPr lang="en-US" sz="1400" dirty="0">
+              <a:rPr lang="en-US" sz="1250" dirty="0">
                 <a:solidFill>
                   <a:schemeClr val="bg1"/>
                 </a:solidFill>
               </a:rPr>
               <a:t>Peschiera et al. — Long-term FMP, French AF (arXiv 2001.09856)</a:t>
             </a:r>
-            <a:endParaRPr lang="en-US" sz="1400" dirty="0"/>
+            <a:endParaRPr lang="en-US" sz="1250" dirty="0"/>
           </a:p>
           <a:p>
             <a:pPr marL="342900" indent="-342900">
               <a:spcAft>
-                <a:spcPts val="800"/>
+                <a:spcPts val="500"/>
               </a:spcAft>
               <a:buSzPct val="100000"/>
               <a:buChar char="•"/>
             </a:pPr>
             <a:r>
-              <a:rPr lang="en-US" sz="1400" dirty="0">
+              <a:rPr lang="en-US" sz="1250" dirty="0">
                 <a:solidFill>
                   <a:schemeClr val="bg1"/>
                 </a:solidFill>
               </a:rPr>
               <a:t>Mattila &amp; Virtanen (2014) — Fighter maintenance sim-optimisation</a:t>
             </a:r>
-            <a:endParaRPr lang="en-US" sz="1400" dirty="0"/>
+            <a:endParaRPr lang="en-US" sz="1250" dirty="0"/>
           </a:p>
           <a:p>
             <a:pPr marL="342900" indent="-342900">
               <a:spcAft>
-                <a:spcPts val="800"/>
+                <a:spcPts val="500"/>
               </a:spcAft>
               <a:buSzPct val="100000"/>
               <a:buChar char="•"/>
             </a:pPr>
             <a:r>
-              <a:rPr lang="en-US" sz="1400" dirty="0">
+              <a:rPr lang="en-US" sz="1250" dirty="0">
                 <a:solidFill>
                   <a:schemeClr val="bg1"/>
                 </a:solidFill>
               </a:rPr>
               <a:t>Sherbrooke — VARI-METRIC, Operations Research (1986)</a:t>
             </a:r>
-            <a:endParaRPr lang="en-US" sz="1400" dirty="0"/>
+            <a:endParaRPr lang="en-US" sz="1250" dirty="0"/>
           </a:p>
           <a:p>
             <a:pPr marL="342900" indent="-342900">
               <a:spcAft>
-                <a:spcPts val="800"/>
+                <a:spcPts val="500"/>
               </a:spcAft>
               <a:buSzPct val="100000"/>
               <a:buChar char="•"/>
             </a:pPr>
             <a:r>
-              <a:rPr lang="en-US" sz="1400" dirty="0">
+              <a:rPr lang="en-US" sz="1250" dirty="0">
                 <a:solidFill>
                   <a:schemeClr val="bg1"/>
                 </a:solidFill>
               </a:rPr>
               <a:t>GAO-02-86 — Military aircraft cannibalisations</a:t>
             </a:r>
-            <a:endParaRPr lang="en-US" sz="1400" dirty="0"/>
+            <a:endParaRPr lang="en-US" sz="1250" dirty="0"/>
           </a:p>
         </p:txBody>
       </p:sp>
@@ -7202,8 +7689,8 @@
         </p:nvSpPr>
         <p:spPr>
           <a:xfrm>
-            <a:off x="8330184" y="1828800"/>
-            <a:ext cx="3246120" cy="2926080"/>
+            <a:off x="8330184" y="1783080"/>
+            <a:ext cx="3246120" cy="3017520"/>
           </a:xfrm>
           <a:prstGeom prst="rect">
             <a:avLst/>
@@ -7217,92 +7704,110 @@
           <a:p>
             <a:pPr marL="342900" indent="-342900">
               <a:spcAft>
-                <a:spcPts val="800"/>
+                <a:spcPts val="500"/>
               </a:spcAft>
               <a:buSzPct val="100000"/>
               <a:buChar char="•"/>
             </a:pPr>
             <a:r>
-              <a:rPr lang="en-US" sz="1400" dirty="0">
+              <a:rPr lang="en-US" sz="1250" dirty="0">
                 <a:solidFill>
                   <a:schemeClr val="bg1"/>
                 </a:solidFill>
               </a:rPr>
               <a:t>Saxena et al. (2008) — NASA C-MAPSS turbofan dataset</a:t>
             </a:r>
-            <a:endParaRPr lang="en-US" sz="1400" dirty="0"/>
+            <a:endParaRPr lang="en-US" sz="1250" dirty="0"/>
           </a:p>
           <a:p>
             <a:pPr marL="342900" indent="-342900">
               <a:spcAft>
-                <a:spcPts val="800"/>
+                <a:spcPts val="500"/>
               </a:spcAft>
               <a:buSzPct val="100000"/>
               <a:buChar char="•"/>
             </a:pPr>
             <a:r>
-              <a:rPr lang="en-US" sz="1400" dirty="0">
+              <a:rPr lang="en-US" sz="1250" dirty="0">
                 <a:solidFill>
                   <a:schemeClr val="bg1"/>
                 </a:solidFill>
               </a:rPr>
               <a:t>LSTM quantile + conformal RUL — Sensors 26(7) 2249 (2026)</a:t>
             </a:r>
-            <a:endParaRPr lang="en-US" sz="1400" dirty="0"/>
+            <a:endParaRPr lang="en-US" sz="1250" dirty="0"/>
           </a:p>
           <a:p>
             <a:pPr marL="342900" indent="-342900">
               <a:spcAft>
-                <a:spcPts val="800"/>
+                <a:spcPts val="500"/>
               </a:spcAft>
               <a:buSzPct val="100000"/>
               <a:buChar char="•"/>
             </a:pPr>
             <a:r>
-              <a:rPr lang="en-US" sz="1400" dirty="0">
+              <a:rPr lang="en-US" sz="1250" dirty="0">
                 <a:solidFill>
                   <a:schemeClr val="bg1"/>
                 </a:solidFill>
               </a:rPr>
               <a:t>Federated RUL prognostics — arXiv 2506.00499</a:t>
             </a:r>
-            <a:endParaRPr lang="en-US" sz="1400" dirty="0"/>
+            <a:endParaRPr lang="en-US" sz="1250" dirty="0"/>
           </a:p>
           <a:p>
             <a:pPr marL="342900" indent="-342900">
               <a:spcAft>
-                <a:spcPts val="800"/>
+                <a:spcPts val="500"/>
               </a:spcAft>
               <a:buSzPct val="100000"/>
               <a:buChar char="•"/>
             </a:pPr>
             <a:r>
-              <a:rPr lang="en-US" sz="1400" dirty="0">
+              <a:rPr lang="en-US" sz="1250" dirty="0">
                 <a:solidFill>
                   <a:schemeClr val="bg1"/>
                 </a:solidFill>
               </a:rPr>
               <a:t>MaintNet aviation logbooks — COLING 2020</a:t>
             </a:r>
-            <a:endParaRPr lang="en-US" sz="1400" dirty="0"/>
+            <a:endParaRPr lang="en-US" sz="1250" dirty="0"/>
           </a:p>
           <a:p>
             <a:pPr marL="342900" indent="-342900">
               <a:spcAft>
-                <a:spcPts val="800"/>
+                <a:spcPts val="500"/>
               </a:spcAft>
               <a:buSzPct val="100000"/>
               <a:buChar char="•"/>
             </a:pPr>
             <a:r>
-              <a:rPr lang="en-US" sz="1400" dirty="0">
+              <a:rPr lang="en-US" sz="1250" dirty="0">
                 <a:solidFill>
                   <a:schemeClr val="bg1"/>
                 </a:solidFill>
               </a:rPr>
               <a:t>DST-Group-TR-3367 — dust-driven engine degradation</a:t>
             </a:r>
-            <a:endParaRPr lang="en-US" sz="1400" dirty="0"/>
+            <a:endParaRPr lang="en-US" sz="1250" dirty="0"/>
+          </a:p>
+          <a:p>
+            <a:pPr marL="342900" indent="-342900">
+              <a:spcAft>
+                <a:spcPts val="500"/>
+              </a:spcAft>
+              <a:buSzPct val="100000"/>
+              <a:buChar char="•"/>
+            </a:pPr>
+            <a:r>
+              <a:rPr lang="en-US" sz="1250" dirty="0">
+                <a:solidFill>
+                  <a:schemeClr val="bg1"/>
+                </a:solidFill>
+              </a:rPr>
+              <a:t>Raza, Aerospace 5(2):38 (2018) — avionics NFF 20–50 %</a:t>
+            </a:r>
+            <a:endParaRPr lang="en-US" sz="1250" dirty="0"/>
           </a:p>
         </p:txBody>
       </p:sp>
@@ -7347,7 +7852,7 @@
                   <a:schemeClr val="bg2"/>
                 </a:solidFill>
               </a:rPr>
-              <a:t>7 public PS-26249 projects reviewed (NIRANTAR, AERO-READY, AeroTwin-AI, AirPower, PREDIX, VAYU SEWA) — none model flight &amp; maintenance planning, multi-echelon sparing or probabilistic readiness. Prototype figures use a notional fleet; no classified data.</a:t>
+              <a:t>7 public PS-26249 projects reviewed (NIRANTAR, AERO-READY, AeroTwin-AI, AirPower, SIH_249, PREDIX, VAYU SEWA) — none model flight &amp; maintenance planning, multi-echelon sparing or probabilistic readiness. Prototype figures use a notional fleet; no classified data.</a:t>
             </a:r>
             <a:endParaRPr lang="en-US" sz="1400" dirty="0"/>
           </a:p>
